--- a/Docs/Presentation/Farol_Sprint_A_Presentation.pptx
+++ b/Docs/Presentation/Farol_Sprint_A_Presentation.pptx
@@ -124,12 +124,12 @@
   <p:extLst>
     <p:ext uri="{521415D9-36F7-43E2-AB2F-B90AF26B5E84}">
       <p14:sectionLst xmlns:p14="http://schemas.microsoft.com/office/powerpoint/2010/main">
-        <p14:section name="Opening" id="{2405d483-2e58-5d62-75ff-a3ef21ca3076}">
+        <p14:section name="Opening" id="{dd3e3070-a4ec-3fee-245e-0181f093dc6b}">
           <p14:sldIdLst>
             <p14:sldId id="256"/>
           </p14:sldIdLst>
         </p14:section>
-        <p14:section name="Product" id="{48a41275-f54c-a4ea-058b-56690407b0f6}">
+        <p14:section name="Product" id="{98e0ec4e-7d94-8ea3-3324-86e01e7e4837}">
           <p14:sldIdLst>
             <p14:sldId id="257"/>
             <p14:sldId id="258"/>
@@ -138,7 +138,7 @@
             <p14:sldId id="261"/>
           </p14:sldIdLst>
         </p14:section>
-        <p14:section name="Design" id="{29ad854f-5b23-2bb0-84f7-a7267bc2bc69}">
+        <p14:section name="Design" id="{9f0186b3-7f19-0d3c-49d8-f6a014fc6eaf}">
           <p14:sldIdLst>
             <p14:sldId id="262"/>
             <p14:sldId id="263"/>
@@ -146,7 +146,7 @@
             <p14:sldId id="265"/>
           </p14:sldIdLst>
         </p14:section>
-        <p14:section name="Plan" id="{ace32686-c9fe-d4a4-1e1c-1f5f42393875}">
+        <p14:section name="Plan" id="{985a0404-c17e-c65f-0cf9-6bb18568a3f5}">
           <p14:sldIdLst>
             <p14:sldId id="266"/>
             <p14:sldId id="267"/>
@@ -154,14 +154,14 @@
             <p14:sldId id="269"/>
           </p14:sldIdLst>
         </p14:section>
-        <p14:section name="Team" id="{e782008c-09b8-d2b1-02f4-a34e9cd86e75}">
+        <p14:section name="Team" id="{23420e0b-593c-0179-c669-648405219c49}">
           <p14:sldIdLst>
             <p14:sldId id="270"/>
             <p14:sldId id="271"/>
             <p14:sldId id="272"/>
           </p14:sldIdLst>
         </p14:section>
-        <p14:section name="Closing" id="{4f9afdcd-2ea5-f84e-22dd-6accf86f547c}">
+        <p14:section name="Closing" id="{73a94d4d-1964-fec1-bc2a-86158ef645d3}">
           <p14:sldIdLst>
             <p14:sldId id="273"/>
           </p14:sldIdLst>
@@ -201,7 +201,7 @@
                 </a:solidFill>
                 <a:latin typeface="+mn-lt"/>
               </a:rPr>
-              <a:t>Most useful features (% of 20, up to 3 each)</a:t>
+              <a:t>Most useful features (% of 24, up to 3 each)</a:t>
             </a:r>
           </a:p>
         </c:rich>
@@ -274,10 +274,10 @@
                     <c:v>Transport home</c:v>
                   </c:pt>
                   <c:pt idx="2">
-                    <c:v>Wait time at entrances</c:v>
+                    <c:v>Help button</c:v>
                   </c:pt>
                   <c:pt idx="3">
-                    <c:v>Help button</c:v>
+                    <c:v>Wait time at entrances</c:v>
                   </c:pt>
                   <c:pt idx="4">
                     <c:v>Live announcements</c:v>
@@ -299,25 +299,25 @@
                 <c:formatCode>General</c:formatCode>
                 <c:ptCount val="7"/>
                 <c:pt idx="0">
-                  <c:v>65</c:v>
+                  <c:v>67</c:v>
                 </c:pt>
                 <c:pt idx="1">
-                  <c:v>50</c:v>
+                  <c:v>54</c:v>
                 </c:pt>
                 <c:pt idx="2">
-                  <c:v>45</c:v>
+                  <c:v>46</c:v>
                 </c:pt>
                 <c:pt idx="3">
-                  <c:v>45</c:v>
+                  <c:v>42</c:v>
                 </c:pt>
                 <c:pt idx="4">
-                  <c:v>40</c:v>
+                  <c:v>38</c:v>
                 </c:pt>
                 <c:pt idx="5">
                   <c:v>25</c:v>
                 </c:pt>
                 <c:pt idx="6">
-                  <c:v>10</c:v>
+                  <c:v>8</c:v>
                 </c:pt>
               </c:numCache>
             </c:numRef>
@@ -941,7 +941,7 @@
           <a:p>
             <a:r>
               <a:rPr lang="en-US" dirty="0"/>
-              <a:t>(~50 s) Os pressupostos críticos são três. A2: os estudantes usam a aplicação durante a noite. O inquérito apoia, 85 % diz que sim, mas é intenção, não comportamento. A3: uma aplicação para vários eventos, aberta por link ou QR. Em parte: 35 % diz que instalar mais uma app os afastaria, o que confirma a decisão de não exigir instalação. A4: pedir ajuda pela app é mais rápido. Ainda não está validado, depende da entrevista ao voluntário de segurança. À direita, as dependências, cada uma com o seu plano B: a API do Porto Digital tem o WireMock; a IA local tem a triagem manual; as plantas vêm das organizações em imagem ou PDF; o acesso à organização é limitado e está documentado; e a demo corre num portátil, com outro de reserva.</a:t>
+              <a:t>(~50 s) Os pressupostos críticos são três. A2: os estudantes usam a aplicação durante a noite. O inquérito apoia, 88 % diz que sim, mas é intenção, não comportamento. A3: uma aplicação para vários eventos, aberta por link ou QR. Em parte: 29 % diz que instalar mais uma app os afastaria, o que confirma a decisão de não exigir instalação. A4: pedir ajuda pela app é mais rápido. Ainda não está validado, depende da entrevista ao voluntário de segurança. À direita, as dependências, cada uma com o seu plano B: a API do Porto Digital tem o WireMock; a IA local tem a triagem manual; as plantas vêm das organizações em imagem ou PDF; o acesso à organização é limitado e está documentado; e a demo corre num portátil, com outro de reserva.</a:t>
             </a:r>
             <a:endParaRPr lang="en-US" dirty="0"/>
           </a:p>
@@ -1821,7 +1821,7 @@
           <a:p>
             <a:r>
               <a:rPr lang="en-US" dirty="0"/>
-              <a:t>(~75 s) Fizemos um inquérito no Google Forms entre 3 e 6 de outubro. Tivemos 21 respostas; 20 de pessoas que já foram a uma Queima, todas à do Porto. É pouco, o objetivo eram 100, e é uma amostra de conveniência, por isso os números mostram direção, não valores exatos. Três coisas: primeiro, 85 % esperou mais de meia hora para entrar, é de longe o problema mais comum. Segundo, 85 % diz que usaria a aplicação durante a noite, acima da meta de 60 %. Terceiro, uma surpresa: a facilidade de encontrar informação teve média 3,7 em 5, por isso a falta de informação não é a dor principal destas pessoas. No gráfico, a planta do recinto é a funcionalidade mais escolhida, 65 %; o assistente de perguntas é a última, 10 %. As barreiras mais citadas foram rede fraca e bateria, 40 % cada.</a:t>
+              <a:t>(~75 s) Fizemos um inquérito no Google Forms em duas vagas: 21 respostas entre 3 e 6 de outubro e mais 4, a 30 de outubro, de amigos de um membro da equipa. Ficam 24 pessoas que já foram a uma Queima, quase todas à do Porto. É pouco, o objetivo eram 100, e é uma amostra de conveniência, por isso os números mostram direção, não valores exatos. Três coisas: primeiro, 88 % esperou mais de meia hora para entrar, é de longe o problema mais comum. Segundo, 88 % diz que usaria a aplicação durante a noite, acima da meta de 60 %. Terceiro, a facilidade de encontrar informação teve média 3,3 em 5, acima do limite de 3 que tínhamos definido, por isso não confirma o problema. Mas as duas vagas discordam muito, 3,7 na primeira e 1,25 na segunda, e as pessoas responderam em casa, longe do ruído e da confusão da noite, por isso fica em aberto até um teste em condições reais. No gráfico, a planta do recinto é a funcionalidade mais escolhida, 67 %; o assistente de perguntas é a última, 8 %. As barreiras mais citadas foram a bateria, 50 %, e a rede fraca, 38 %.</a:t>
             </a:r>
             <a:endParaRPr lang="en-US" dirty="0"/>
           </a:p>
@@ -1909,7 +1909,7 @@
           <a:p>
             <a:r>
               <a:rPr lang="en-US" dirty="0"/>
-              <a:t>(~60 s) Do inquérito tirámos cinco decisões. Duas confirmam o que já tínhamos: a planta é o centro da aplicação, e a IA fica na triagem dos pedidos de ajuda e não num chatbot para participantes, que quase ninguém escolheu. Três mudam o backlog e estão propostas à equipa: o estado das entradas por porta sobe de Could para Should, porque a espera é o problema mais comum; a rede fraca e a bateria passam a ser restrições de desenho, com páginas leves, e o modo de rede fraca volta a ser discutido; e no pedido de ajuda a marcação na planta continua a funcionar sempre, mas a localização do telemóvel passa a ser um atalho opcional, porque 80 % aceita partilhá-la e ninguém recusa. O pressuposto de que pedir ajuda pela app é mais rápido ainda não está validado: falta a entrevista ao voluntário de segurança.</a:t>
+              <a:t>(~60 s) Do inquérito tirámos cinco decisões. Duas confirmam o que já tínhamos: a planta é o centro da aplicação, e a IA fica na triagem dos pedidos de ajuda e não num chatbot para participantes, que quase ninguém escolheu. Três mudam o backlog e estão propostas à equipa: o estado das entradas por porta sobe de Could para Should, porque a espera é o problema mais comum; a rede fraca e a bateria passam a ser restrições de desenho, com páginas leves, e o modo de rede fraca volta a ser discutido; e no pedido de ajuda a marcação na planta continua a funcionar sempre, mas a localização do telemóvel passa a ser um atalho opcional, porque 79 % aceita partilhá-la e ninguém recusa. O pressuposto de que pedir ajuda pela app é mais rápido ainda não está validado: falta a entrevista ao voluntário de segurança.</a:t>
             </a:r>
             <a:endParaRPr lang="en-US" dirty="0"/>
           </a:p>
@@ -3574,7 +3574,7 @@
                   <a:schemeClr val="accent3"/>
                 </a:solidFill>
               </a:rPr>
-              <a:t>Supported: 85 % say they would (intention)</a:t>
+              <a:t>Supported: 88 % say they would (intention)</a:t>
             </a:r>
             <a:endParaRPr lang="en-US" sz="1200" dirty="0"/>
           </a:p>
@@ -3724,7 +3724,7 @@
                   <a:schemeClr val="accent3"/>
                 </a:solidFill>
               </a:rPr>
-              <a:t>Partly: 35 % name installing as a barrier</a:t>
+              <a:t>Partly: 29 % name installing as a barrier</a:t>
             </a:r>
             <a:endParaRPr lang="en-US" sz="1200" dirty="0"/>
           </a:p>
@@ -11680,7 +11680,7 @@
                   <a:schemeClr val="tx2"/>
                 </a:solidFill>
               </a:rPr>
-              <a:t>What 20 students told us</a:t>
+              <a:t>What 24 students told us</a:t>
             </a:r>
             <a:endParaRPr lang="en-US" sz="3000" dirty="0"/>
           </a:p>
@@ -11738,7 +11738,7 @@
                   <a:schemeClr val="accent5"/>
                 </a:solidFill>
               </a:rPr>
-              <a:t>85 %</a:t>
+              <a:t>88 %</a:t>
             </a:r>
             <a:endParaRPr lang="en-US" sz="3200" dirty="0"/>
           </a:p>
@@ -11832,7 +11832,7 @@
                   <a:schemeClr val="accent4"/>
                 </a:solidFill>
               </a:rPr>
-              <a:t>85 %</a:t>
+              <a:t>88 %</a:t>
             </a:r>
             <a:endParaRPr lang="en-US" sz="3200" dirty="0"/>
           </a:p>
@@ -11926,7 +11926,7 @@
                   <a:schemeClr val="accent2"/>
                 </a:solidFill>
               </a:rPr>
-              <a:t>3.7 / 5</a:t>
+              <a:t>3.3 / 5</a:t>
             </a:r>
             <a:endParaRPr lang="en-US" sz="3200" dirty="0"/>
           </a:p>
@@ -11962,7 +11962,7 @@
                   <a:schemeClr val="tx1"/>
                 </a:solidFill>
               </a:rPr>
-              <a:t>finding information was fairly easy (1–5)</a:t>
+              <a:t>ease of finding info · waves: 3.7 and 1.25</a:t>
             </a:r>
             <a:endParaRPr lang="en-US" sz="1300" dirty="0"/>
           </a:p>
@@ -12014,7 +12014,7 @@
                   <a:schemeClr val="accent3"/>
                 </a:solidFill>
               </a:rPr>
-              <a:t>Google Forms, 3–6 Oct 2026 · 21 answers, n = 20 who have been to a Queima · convenience sample, all from Porto</a:t>
+              <a:t>Google Forms, 3–6 Oct (21) and 30 Oct 2026 (4, friends of the team) · n = 24 who have been to a Queima · convenience sample</a:t>
             </a:r>
             <a:endParaRPr lang="en-US" sz="1100" dirty="0"/>
           </a:p>
@@ -12260,7 +12260,7 @@
                   <a:schemeClr val="accent3"/>
                 </a:solidFill>
               </a:rPr>
-              <a:t>Most chosen feature: 13 of 20</a:t>
+              <a:t>Most chosen feature: 16 of 24</a:t>
             </a:r>
             <a:endParaRPr lang="en-US" sz="1200" dirty="0"/>
           </a:p>
@@ -12456,7 +12456,7 @@
                   <a:schemeClr val="accent3"/>
                 </a:solidFill>
               </a:rPr>
-              <a:t>17 of 20 waited &gt; 30 min to get in</a:t>
+              <a:t>21 of 24 waited &gt; 30 min to get in</a:t>
             </a:r>
             <a:endParaRPr lang="en-US" sz="1200" dirty="0"/>
           </a:p>
@@ -12652,7 +12652,7 @@
                   <a:schemeClr val="accent3"/>
                 </a:solidFill>
               </a:rPr>
-              <a:t>Network and battery: 8 of 20 each</a:t>
+              <a:t>Battery 12 of 24, network 9 of 24</a:t>
             </a:r>
             <a:endParaRPr lang="en-US" sz="1200" dirty="0"/>
           </a:p>
@@ -12848,7 +12848,7 @@
                   <a:schemeClr val="accent3"/>
                 </a:solidFill>
               </a:rPr>
-              <a:t>16 of 20 share GPS; nobody refuses</a:t>
+              <a:t>19 of 24 share GPS; nobody refuses</a:t>
             </a:r>
             <a:endParaRPr lang="en-US" sz="1200" dirty="0"/>
           </a:p>
@@ -13044,7 +13044,7 @@
                   <a:schemeClr val="accent3"/>
                 </a:solidFill>
               </a:rPr>
-              <a:t>Assistant chosen by 2 of 20</a:t>
+              <a:t>Assistant chosen by 2 of 24</a:t>
             </a:r>
             <a:endParaRPr lang="en-US" sz="1200" dirty="0"/>
           </a:p>

--- a/Docs/Presentation/Farol_Sprint_A_Presentation.pptx
+++ b/Docs/Presentation/Farol_Sprint_A_Presentation.pptx
@@ -124,12 +124,12 @@
   <p:extLst>
     <p:ext uri="{521415D9-36F7-43E2-AB2F-B90AF26B5E84}">
       <p14:sectionLst xmlns:p14="http://schemas.microsoft.com/office/powerpoint/2010/main">
-        <p14:section name="Opening" id="{dd3e3070-a4ec-3fee-245e-0181f093dc6b}">
+        <p14:section name="Opening" id="{66c22273-205e-0d3d-75c1-1c7b0afe3447}">
           <p14:sldIdLst>
             <p14:sldId id="256"/>
           </p14:sldIdLst>
         </p14:section>
-        <p14:section name="Product" id="{98e0ec4e-7d94-8ea3-3324-86e01e7e4837}">
+        <p14:section name="Product" id="{cce10b7c-c028-91ff-5ea3-a3b1ff6529b9}">
           <p14:sldIdLst>
             <p14:sldId id="257"/>
             <p14:sldId id="258"/>
@@ -138,7 +138,7 @@
             <p14:sldId id="261"/>
           </p14:sldIdLst>
         </p14:section>
-        <p14:section name="Design" id="{9f0186b3-7f19-0d3c-49d8-f6a014fc6eaf}">
+        <p14:section name="Design" id="{e733231d-48c7-7ec1-a67b-106ee591d0d3}">
           <p14:sldIdLst>
             <p14:sldId id="262"/>
             <p14:sldId id="263"/>
@@ -146,7 +146,7 @@
             <p14:sldId id="265"/>
           </p14:sldIdLst>
         </p14:section>
-        <p14:section name="Plan" id="{985a0404-c17e-c65f-0cf9-6bb18568a3f5}">
+        <p14:section name="Plan" id="{df8ffa44-1dde-fcd8-dc4c-5a5252ffc37f}">
           <p14:sldIdLst>
             <p14:sldId id="266"/>
             <p14:sldId id="267"/>
@@ -154,14 +154,14 @@
             <p14:sldId id="269"/>
           </p14:sldIdLst>
         </p14:section>
-        <p14:section name="Team" id="{23420e0b-593c-0179-c669-648405219c49}">
+        <p14:section name="Team" id="{0a1bca8e-3ba1-2e38-d9ce-3736203af46a}">
           <p14:sldIdLst>
             <p14:sldId id="270"/>
             <p14:sldId id="271"/>
             <p14:sldId id="272"/>
           </p14:sldIdLst>
         </p14:section>
-        <p14:section name="Closing" id="{73a94d4d-1964-fec1-bc2a-86158ef645d3}">
+        <p14:section name="Closing" id="{50832363-413b-e52d-63b5-0b4192625bb8}">
           <p14:sldIdLst>
             <p14:sldId id="273"/>
           </p14:sldIdLst>
@@ -201,7 +201,7 @@
                 </a:solidFill>
                 <a:latin typeface="+mn-lt"/>
               </a:rPr>
-              <a:t>Most useful features (% of 24, up to 3 each)</a:t>
+              <a:t>Most useful features (% of 32, up to 3 each)</a:t>
             </a:r>
           </a:p>
         </c:rich>
@@ -271,10 +271,10 @@
                     <c:v>Venue map</c:v>
                   </c:pt>
                   <c:pt idx="1">
-                    <c:v>Transport home</c:v>
+                    <c:v>Help button</c:v>
                   </c:pt>
                   <c:pt idx="2">
-                    <c:v>Help button</c:v>
+                    <c:v>Transport home</c:v>
                   </c:pt>
                   <c:pt idx="3">
                     <c:v>Wait time at entrances</c:v>
@@ -299,25 +299,25 @@
                 <c:formatCode>General</c:formatCode>
                 <c:ptCount val="7"/>
                 <c:pt idx="0">
-                  <c:v>67</c:v>
+                  <c:v>53</c:v>
                 </c:pt>
                 <c:pt idx="1">
-                  <c:v>54</c:v>
+                  <c:v>50</c:v>
                 </c:pt>
                 <c:pt idx="2">
-                  <c:v>46</c:v>
+                  <c:v>44</c:v>
                 </c:pt>
                 <c:pt idx="3">
-                  <c:v>42</c:v>
+                  <c:v>41</c:v>
                 </c:pt>
                 <c:pt idx="4">
                   <c:v>38</c:v>
                 </c:pt>
                 <c:pt idx="5">
-                  <c:v>25</c:v>
+                  <c:v>31</c:v>
                 </c:pt>
                 <c:pt idx="6">
-                  <c:v>8</c:v>
+                  <c:v>9</c:v>
                 </c:pt>
               </c:numCache>
             </c:numRef>
@@ -941,7 +941,7 @@
           <a:p>
             <a:r>
               <a:rPr lang="en-US" dirty="0"/>
-              <a:t>(~50 s) Os pressupostos críticos são três. A2: os estudantes usam a aplicação durante a noite. O inquérito apoia, 88 % diz que sim, mas é intenção, não comportamento. A3: uma aplicação para vários eventos, aberta por link ou QR. Em parte: 29 % diz que instalar mais uma app os afastaria, o que confirma a decisão de não exigir instalação. A4: pedir ajuda pela app é mais rápido. Ainda não está validado, depende da entrevista ao voluntário de segurança. À direita, as dependências, cada uma com o seu plano B: a API do Porto Digital tem o WireMock; a IA local tem a triagem manual; as plantas vêm das organizações em imagem ou PDF; o acesso à organização é limitado e está documentado; e a demo corre num portátil, com outro de reserva.</a:t>
+              <a:t>(~50 s) Os pressupostos críticos são três. A2: os estudantes usam a aplicação durante a noite. O inquérito apoia, 84 % diz que sim, mas é intenção, não comportamento. A3: uma aplicação para vários eventos, aberta por link ou QR. Em parte: 38 % diz que instalar mais uma app os afastaria, o que confirma a decisão de não exigir instalação. A4: pedir ajuda pela app é mais rápido. Ainda não está validado, depende da entrevista ao voluntário de segurança. À direita, as dependências, cada uma com o seu plano B: a API do Porto Digital tem o WireMock; a IA local tem a triagem manual; as plantas vêm das organizações em imagem ou PDF; o acesso à organização é limitado e está documentado; e a demo corre num portátil, com outro de reserva.</a:t>
             </a:r>
             <a:endParaRPr lang="en-US" dirty="0"/>
           </a:p>
@@ -1821,7 +1821,7 @@
           <a:p>
             <a:r>
               <a:rPr lang="en-US" dirty="0"/>
-              <a:t>(~75 s) Fizemos um inquérito no Google Forms em duas vagas: 21 respostas entre 3 e 6 de outubro e mais 4, a 30 de outubro, de amigos de um membro da equipa. Ficam 24 pessoas que já foram a uma Queima, quase todas à do Porto. É pouco, o objetivo eram 100, e é uma amostra de conveniência, por isso os números mostram direção, não valores exatos. Três coisas: primeiro, 88 % esperou mais de meia hora para entrar, é de longe o problema mais comum. Segundo, 88 % diz que usaria a aplicação durante a noite, acima da meta de 60 %. Terceiro, a facilidade de encontrar informação teve média 3,3 em 5, acima do limite de 3 que tínhamos definido, por isso não confirma o problema. Mas as duas vagas discordam muito, 3,7 na primeira e 1,25 na segunda, e as pessoas responderam em casa, longe do ruído e da confusão da noite, por isso fica em aberto até um teste em condições reais. No gráfico, a planta do recinto é a funcionalidade mais escolhida, 67 %; o assistente de perguntas é a última, 8 %. As barreiras mais citadas foram a bateria, 50 %, e a rede fraca, 38 %.</a:t>
+              <a:t>(~75 s) Fizemos um inquérito no Google Forms em três vagas: 21 respostas entre 3 e 6 de outubro e mais 12 a 30 de outubro. Ficam 31 pessoas que já foram a um festival académico, a maioria à Queima do Porto. É pouco, o objetivo eram 100, e é uma amostra de conveniência, por isso os números mostram direção, não valores exatos. Três coisas: primeiro, 77 % esperou mais de meia hora para entrar, é de longe o problema mais comum. Segundo, 84 % diz que usaria a aplicação durante a noite, acima da meta de 60 %. Terceiro, a facilidade de encontrar informação teve média 2,97 em 5, no limite da meta de 3. Mas as vagas discordam muito: a primeira sozinha dá 3,7 e as duas seguintes 1,6. Por isso tratamos este resultado como um indício fraco e vamos confirmá-lo com um teste em condições de noite, com ruído e rede lenta. No gráfico, a planta do recinto é a funcionalidade mais escolhida, 53 %, logo seguida do botão de ajuda, 50 %; o assistente de perguntas é a última, 9 %. A barreira mais citada foi a bateria, 47 %.</a:t>
             </a:r>
             <a:endParaRPr lang="en-US" dirty="0"/>
           </a:p>
@@ -1909,7 +1909,7 @@
           <a:p>
             <a:r>
               <a:rPr lang="en-US" dirty="0"/>
-              <a:t>(~60 s) Do inquérito tirámos cinco decisões. Duas confirmam o que já tínhamos: a planta é o centro da aplicação, e a IA fica na triagem dos pedidos de ajuda e não num chatbot para participantes, que quase ninguém escolheu. Três mudam o backlog e estão propostas à equipa: o estado das entradas por porta sobe de Could para Should, porque a espera é o problema mais comum; a rede fraca e a bateria passam a ser restrições de desenho, com páginas leves, e o modo de rede fraca volta a ser discutido; e no pedido de ajuda a marcação na planta continua a funcionar sempre, mas a localização do telemóvel passa a ser um atalho opcional, porque 79 % aceita partilhá-la e ninguém recusa. O pressuposto de que pedir ajuda pela app é mais rápido ainda não está validado: falta a entrevista ao voluntário de segurança.</a:t>
+              <a:t>(~60 s) Do inquérito tirámos cinco decisões. Duas confirmam o que já tínhamos: a planta é o centro da aplicação, e a IA fica na triagem dos pedidos de ajuda e não num chatbot para participantes, que quase ninguém escolheu. Três mudam o backlog e estão propostas à equipa: o estado das entradas por porta sobe de Could para Should, porque a espera é o problema mais comum; a rede fraca e a bateria passam a ser restrições de desenho, com páginas leves, e o modo de rede fraca volta a ser discutido; e no pedido de ajuda a marcação na planta continua a funcionar sempre, mas a localização do telemóvel passa a ser um atalho opcional, porque 69 % aceita partilhá-la e quase todos os outros preferem marcar o sítio na planta. O pressuposto de que pedir ajuda pela app é mais rápido ainda não está validado: falta a entrevista ao voluntário de segurança.</a:t>
             </a:r>
             <a:endParaRPr lang="en-US" dirty="0"/>
           </a:p>
@@ -3574,7 +3574,7 @@
                   <a:schemeClr val="accent3"/>
                 </a:solidFill>
               </a:rPr>
-              <a:t>Supported: 88 % say they would (intention)</a:t>
+              <a:t>Supported: 84 % say they would (intention)</a:t>
             </a:r>
             <a:endParaRPr lang="en-US" sz="1200" dirty="0"/>
           </a:p>
@@ -3724,7 +3724,7 @@
                   <a:schemeClr val="accent3"/>
                 </a:solidFill>
               </a:rPr>
-              <a:t>Partly: 29 % name installing as a barrier</a:t>
+              <a:t>Partly: 38 % name installing as a barrier</a:t>
             </a:r>
             <a:endParaRPr lang="en-US" sz="1200" dirty="0"/>
           </a:p>
@@ -11680,7 +11680,7 @@
                   <a:schemeClr val="tx2"/>
                 </a:solidFill>
               </a:rPr>
-              <a:t>What 24 students told us</a:t>
+              <a:t>What students told us</a:t>
             </a:r>
             <a:endParaRPr lang="en-US" sz="3000" dirty="0"/>
           </a:p>
@@ -11738,7 +11738,7 @@
                   <a:schemeClr val="accent5"/>
                 </a:solidFill>
               </a:rPr>
-              <a:t>88 %</a:t>
+              <a:t>77 %</a:t>
             </a:r>
             <a:endParaRPr lang="en-US" sz="3200" dirty="0"/>
           </a:p>
@@ -11832,7 +11832,7 @@
                   <a:schemeClr val="accent4"/>
                 </a:solidFill>
               </a:rPr>
-              <a:t>88 %</a:t>
+              <a:t>84 %</a:t>
             </a:r>
             <a:endParaRPr lang="en-US" sz="3200" dirty="0"/>
           </a:p>
@@ -11926,7 +11926,7 @@
                   <a:schemeClr val="accent2"/>
                 </a:solidFill>
               </a:rPr>
-              <a:t>3.3 / 5</a:t>
+              <a:t>2.97 / 5</a:t>
             </a:r>
             <a:endParaRPr lang="en-US" sz="3200" dirty="0"/>
           </a:p>
@@ -11962,7 +11962,7 @@
                   <a:schemeClr val="tx1"/>
                 </a:solidFill>
               </a:rPr>
-              <a:t>ease of finding info · waves: 3.7 and 1.25</a:t>
+              <a:t>ease of finding info · wave 1 alone: 3.7</a:t>
             </a:r>
             <a:endParaRPr lang="en-US" sz="1300" dirty="0"/>
           </a:p>
@@ -12014,7 +12014,7 @@
                   <a:schemeClr val="accent3"/>
                 </a:solidFill>
               </a:rPr>
-              <a:t>Google Forms, 3–6 Oct (21) and 30 Oct 2026 (4, friends of the team) · n = 24 who have been to a Queima · convenience sample</a:t>
+              <a:t>Google Forms in three waves (3–6 Oct and 30 Oct 2026) · 33 answers, n = 31 who have been · convenience sample</a:t>
             </a:r>
             <a:endParaRPr lang="en-US" sz="1100" dirty="0"/>
           </a:p>
@@ -12260,7 +12260,7 @@
                   <a:schemeClr val="accent3"/>
                 </a:solidFill>
               </a:rPr>
-              <a:t>Most chosen feature: 16 of 24</a:t>
+              <a:t>Most chosen feature: 17 of 32</a:t>
             </a:r>
             <a:endParaRPr lang="en-US" sz="1200" dirty="0"/>
           </a:p>
@@ -12456,7 +12456,7 @@
                   <a:schemeClr val="accent3"/>
                 </a:solidFill>
               </a:rPr>
-              <a:t>21 of 24 waited &gt; 30 min to get in</a:t>
+              <a:t>24 of 31 waited &gt; 30 min to get in</a:t>
             </a:r>
             <a:endParaRPr lang="en-US" sz="1200" dirty="0"/>
           </a:p>
@@ -12652,7 +12652,7 @@
                   <a:schemeClr val="accent3"/>
                 </a:solidFill>
               </a:rPr>
-              <a:t>Battery 12 of 24, network 9 of 24</a:t>
+              <a:t>Battery 15 of 32, network 10 of 32</a:t>
             </a:r>
             <a:endParaRPr lang="en-US" sz="1200" dirty="0"/>
           </a:p>
@@ -12848,7 +12848,7 @@
                   <a:schemeClr val="accent3"/>
                 </a:solidFill>
               </a:rPr>
-              <a:t>19 of 24 share GPS; nobody refuses</a:t>
+              <a:t>22 of 32 share GPS, 9 only the pin</a:t>
             </a:r>
             <a:endParaRPr lang="en-US" sz="1200" dirty="0"/>
           </a:p>
@@ -13044,7 +13044,7 @@
                   <a:schemeClr val="accent3"/>
                 </a:solidFill>
               </a:rPr>
-              <a:t>Assistant chosen by 2 of 24</a:t>
+              <a:t>Assistant chosen by 3 of 32</a:t>
             </a:r>
             <a:endParaRPr lang="en-US" sz="1200" dirty="0"/>
           </a:p>

--- a/Docs/Presentation/Farol_Sprint_A_Presentation.pptx
+++ b/Docs/Presentation/Farol_Sprint_A_Presentation.pptx
@@ -124,12 +124,12 @@
   <p:extLst>
     <p:ext uri="{521415D9-36F7-43E2-AB2F-B90AF26B5E84}">
       <p14:sectionLst xmlns:p14="http://schemas.microsoft.com/office/powerpoint/2010/main">
-        <p14:section name="Opening" id="{66c22273-205e-0d3d-75c1-1c7b0afe3447}">
+        <p14:section name="Opening" id="{374a2afd-8dac-82c4-49be-36b08240dee8}">
           <p14:sldIdLst>
             <p14:sldId id="256"/>
           </p14:sldIdLst>
         </p14:section>
-        <p14:section name="Product" id="{cce10b7c-c028-91ff-5ea3-a3b1ff6529b9}">
+        <p14:section name="Product" id="{f84b6e31-f104-2083-b934-89fd312814e0}">
           <p14:sldIdLst>
             <p14:sldId id="257"/>
             <p14:sldId id="258"/>
@@ -138,7 +138,7 @@
             <p14:sldId id="261"/>
           </p14:sldIdLst>
         </p14:section>
-        <p14:section name="Design" id="{e733231d-48c7-7ec1-a67b-106ee591d0d3}">
+        <p14:section name="Design" id="{bfae25ff-07b3-6269-57f5-6d0bb00d7986}">
           <p14:sldIdLst>
             <p14:sldId id="262"/>
             <p14:sldId id="263"/>
@@ -146,7 +146,7 @@
             <p14:sldId id="265"/>
           </p14:sldIdLst>
         </p14:section>
-        <p14:section name="Plan" id="{df8ffa44-1dde-fcd8-dc4c-5a5252ffc37f}">
+        <p14:section name="Plan" id="{42e7ee0a-6699-6015-7942-c854147819b2}">
           <p14:sldIdLst>
             <p14:sldId id="266"/>
             <p14:sldId id="267"/>
@@ -154,14 +154,14 @@
             <p14:sldId id="269"/>
           </p14:sldIdLst>
         </p14:section>
-        <p14:section name="Team" id="{0a1bca8e-3ba1-2e38-d9ce-3736203af46a}">
+        <p14:section name="Team" id="{75fdbe43-cc82-c9ea-b12e-70d5ad5e0037}">
           <p14:sldIdLst>
             <p14:sldId id="270"/>
             <p14:sldId id="271"/>
             <p14:sldId id="272"/>
           </p14:sldIdLst>
         </p14:section>
-        <p14:section name="Closing" id="{50832363-413b-e52d-63b5-0b4192625bb8}">
+        <p14:section name="Closing" id="{6c1e46ac-b5bc-ed91-647f-66e90f5c8d9c}">
           <p14:sldIdLst>
             <p14:sldId id="273"/>
           </p14:sldIdLst>
@@ -1821,7 +1821,7 @@
           <a:p>
             <a:r>
               <a:rPr lang="en-US" dirty="0"/>
-              <a:t>(~75 s) Fizemos um inquérito no Google Forms em três vagas: 21 respostas entre 3 e 6 de outubro e mais 12 a 30 de outubro. Ficam 31 pessoas que já foram a um festival académico, a maioria à Queima do Porto. É pouco, o objetivo eram 100, e é uma amostra de conveniência, por isso os números mostram direção, não valores exatos. Três coisas: primeiro, 77 % esperou mais de meia hora para entrar, é de longe o problema mais comum. Segundo, 84 % diz que usaria a aplicação durante a noite, acima da meta de 60 %. Terceiro, a facilidade de encontrar informação teve média 2,97 em 5, no limite da meta de 3. Mas as vagas discordam muito: a primeira sozinha dá 3,7 e as duas seguintes 1,6. Por isso tratamos este resultado como um indício fraco e vamos confirmá-lo com um teste em condições de noite, com ruído e rede lenta. No gráfico, a planta do recinto é a funcionalidade mais escolhida, 53 %, logo seguida do botão de ajuda, 50 %; o assistente de perguntas é a última, 9 %. A barreira mais citada foi a bateria, 47 %.</a:t>
+              <a:t>(~75 s) Fizemos um inquérito no Google Forms entre 3 e 6 de outubro e a 30 de outubro, com 33 respostas. Ficam 31 pessoas que já foram a um festival académico, a maioria à Queima do Porto. É pouco, o objetivo eram 100, e é uma amostra de conveniência, por isso os números mostram direção, não valores exatos. Três coisas: primeiro, 77 % esperou mais de meia hora para entrar, é de longe o problema mais comum. Segundo, 84 % diz que usaria a aplicação durante a noite, acima da meta de 60 %. Terceiro, a facilidade de encontrar informação teve média 2,97 em 5, mesmo no limite da meta de 3, e o resultado depende das respostas de 30 de outubro; por isso vamos confirmá-lo com um teste em condições de noite, com ruído e rede lenta. No gráfico, a planta do recinto é a funcionalidade mais escolhida, 53 %, logo seguida do botão de ajuda, 50 %; o assistente de perguntas é a última, 9 %. A barreira mais citada foi a bateria, 47 %.</a:t>
             </a:r>
             <a:endParaRPr lang="en-US" dirty="0"/>
           </a:p>
@@ -11962,7 +11962,7 @@
                   <a:schemeClr val="tx1"/>
                 </a:solidFill>
               </a:rPr>
-              <a:t>ease of finding info · wave 1 alone: 3.7</a:t>
+              <a:t>ease of finding information (1–5)</a:t>
             </a:r>
             <a:endParaRPr lang="en-US" sz="1300" dirty="0"/>
           </a:p>
@@ -12014,7 +12014,7 @@
                   <a:schemeClr val="accent3"/>
                 </a:solidFill>
               </a:rPr>
-              <a:t>Google Forms in three waves (3–6 Oct and 30 Oct 2026) · 33 answers, n = 31 who have been · convenience sample</a:t>
+              <a:t>Google Forms, 3–6 and 30 Oct 2026 · 33 answers, n = 31 who have been to a festival · convenience sample</a:t>
             </a:r>
             <a:endParaRPr lang="en-US" sz="1100" dirty="0"/>
           </a:p>

--- a/Docs/Presentation/Farol_Sprint_A_Presentation.pptx
+++ b/Docs/Presentation/Farol_Sprint_A_Presentation.pptx
@@ -124,12 +124,12 @@
   <p:extLst>
     <p:ext uri="{521415D9-36F7-43E2-AB2F-B90AF26B5E84}">
       <p14:sectionLst xmlns:p14="http://schemas.microsoft.com/office/powerpoint/2010/main">
-        <p14:section name="Opening" id="{374a2afd-8dac-82c4-49be-36b08240dee8}">
+        <p14:section name="Opening" id="{e7b5d382-112e-55e4-9f3f-ec4adb3b9acc}">
           <p14:sldIdLst>
             <p14:sldId id="256"/>
           </p14:sldIdLst>
         </p14:section>
-        <p14:section name="Product" id="{f84b6e31-f104-2083-b934-89fd312814e0}">
+        <p14:section name="Product" id="{184b4c8b-7c6c-6c76-b760-5958322696a2}">
           <p14:sldIdLst>
             <p14:sldId id="257"/>
             <p14:sldId id="258"/>
@@ -138,7 +138,7 @@
             <p14:sldId id="261"/>
           </p14:sldIdLst>
         </p14:section>
-        <p14:section name="Design" id="{bfae25ff-07b3-6269-57f5-6d0bb00d7986}">
+        <p14:section name="Design" id="{288eb3a8-013b-d5ec-57a2-8a646247092a}">
           <p14:sldIdLst>
             <p14:sldId id="262"/>
             <p14:sldId id="263"/>
@@ -146,7 +146,7 @@
             <p14:sldId id="265"/>
           </p14:sldIdLst>
         </p14:section>
-        <p14:section name="Plan" id="{42e7ee0a-6699-6015-7942-c854147819b2}">
+        <p14:section name="Plan" id="{52a9c346-c652-72e7-517a-59a719764e94}">
           <p14:sldIdLst>
             <p14:sldId id="266"/>
             <p14:sldId id="267"/>
@@ -154,14 +154,14 @@
             <p14:sldId id="269"/>
           </p14:sldIdLst>
         </p14:section>
-        <p14:section name="Team" id="{75fdbe43-cc82-c9ea-b12e-70d5ad5e0037}">
+        <p14:section name="Team" id="{abeefc53-192b-898c-490d-bc4199dd3b23}">
           <p14:sldIdLst>
             <p14:sldId id="270"/>
             <p14:sldId id="271"/>
             <p14:sldId id="272"/>
           </p14:sldIdLst>
         </p14:section>
-        <p14:section name="Closing" id="{6c1e46ac-b5bc-ed91-647f-66e90f5c8d9c}">
+        <p14:section name="Closing" id="{7e9be91b-49f2-49c9-cd0b-d78e89aa4f39}">
           <p14:sldIdLst>
             <p14:sldId id="273"/>
           </p14:sldIdLst>
@@ -201,7 +201,7 @@
                 </a:solidFill>
                 <a:latin typeface="+mn-lt"/>
               </a:rPr>
-              <a:t>Most useful features (% of 32, up to 3 each)</a:t>
+              <a:t>Most useful features (% of 31, up to 3 each)</a:t>
             </a:r>
           </a:p>
         </c:rich>
@@ -299,25 +299,25 @@
                 <c:formatCode>General</c:formatCode>
                 <c:ptCount val="7"/>
                 <c:pt idx="0">
-                  <c:v>53</c:v>
+                  <c:v>52</c:v>
                 </c:pt>
                 <c:pt idx="1">
-                  <c:v>50</c:v>
+                  <c:v>48</c:v>
                 </c:pt>
                 <c:pt idx="2">
-                  <c:v>44</c:v>
+                  <c:v>45</c:v>
                 </c:pt>
                 <c:pt idx="3">
-                  <c:v>41</c:v>
+                  <c:v>39</c:v>
                 </c:pt>
                 <c:pt idx="4">
-                  <c:v>38</c:v>
+                  <c:v>39</c:v>
                 </c:pt>
                 <c:pt idx="5">
-                  <c:v>31</c:v>
+                  <c:v>32</c:v>
                 </c:pt>
                 <c:pt idx="6">
-                  <c:v>9</c:v>
+                  <c:v>10</c:v>
                 </c:pt>
               </c:numCache>
             </c:numRef>
@@ -941,7 +941,7 @@
           <a:p>
             <a:r>
               <a:rPr lang="en-US" dirty="0"/>
-              <a:t>(~50 s) Os pressupostos críticos são três. A2: os estudantes usam a aplicação durante a noite. O inquérito apoia, 84 % diz que sim, mas é intenção, não comportamento. A3: uma aplicação para vários eventos, aberta por link ou QR. Em parte: 38 % diz que instalar mais uma app os afastaria, o que confirma a decisão de não exigir instalação. A4: pedir ajuda pela app é mais rápido. Ainda não está validado, depende da entrevista ao voluntário de segurança. À direita, as dependências, cada uma com o seu plano B: a API do Porto Digital tem o WireMock; a IA local tem a triagem manual; as plantas vêm das organizações em imagem ou PDF; o acesso à organização é limitado e está documentado; e a demo corre num portátil, com outro de reserva.</a:t>
+              <a:t>(~50 s) Os pressupostos críticos são três. A2: os estudantes usam a aplicação durante a noite. O inquérito apoia, 87 % diz que sim, mas é intenção, não comportamento. A3: uma aplicação para vários eventos, aberta por link ou QR. Em parte: 39 % diz que instalar mais uma app os afastaria, o que confirma a decisão de não exigir instalação. A4: pedir ajuda pela app é mais rápido. Ainda não está validado, depende da entrevista ao voluntário de segurança. À direita, as dependências, cada uma com o seu plano B: a API do Porto Digital tem o WireMock; a IA local tem a triagem manual; as plantas vêm das organizações em imagem ou PDF; o acesso à organização é limitado e está documentado; e a demo corre num portátil, com outro de reserva.</a:t>
             </a:r>
             <a:endParaRPr lang="en-US" dirty="0"/>
           </a:p>
@@ -1645,7 +1645,7 @@
           <a:p>
             <a:r>
               <a:rPr lang="en-US" dirty="0"/>
-              <a:t>(~30 s) Próximos passos: pôr o walking skeleton a correr antes de 2 de novembro; fazer a entrevista ao voluntário de segurança para validar o pressuposto A4 e as personas do Miguel e da Inês; confirmar em equipa as mudanças ao backlog que o inquérito sugere; e entregar a fatia vertical a 6 de dezembro. Obrigado, ficamos para perguntas.</a:t>
+              <a:t>(~30 s) Próximos passos: pôr o walking skeleton a correr antes de 2 de novembro; fazer a entrevista ao voluntário de segurança para validar o pressuposto A4 e as personas do Miguel e da Inês; aplicar ao backlog as mudanças que o inquérito trouxe, no próximo planeamento; e entregar a fatia vertical a 6 de dezembro. Obrigado, ficamos para perguntas.</a:t>
             </a:r>
             <a:endParaRPr lang="en-US" dirty="0"/>
           </a:p>
@@ -1821,7 +1821,7 @@
           <a:p>
             <a:r>
               <a:rPr lang="en-US" dirty="0"/>
-              <a:t>(~75 s) Fizemos um inquérito no Google Forms entre 3 e 6 de outubro e a 30 de outubro, com 33 respostas. Ficam 31 pessoas que já foram a um festival académico, a maioria à Queima do Porto. É pouco, o objetivo eram 100, e é uma amostra de conveniência, por isso os números mostram direção, não valores exatos. Três coisas: primeiro, 77 % esperou mais de meia hora para entrar, é de longe o problema mais comum. Segundo, 84 % diz que usaria a aplicação durante a noite, acima da meta de 60 %. Terceiro, a facilidade de encontrar informação teve média 2,97 em 5, mesmo no limite da meta de 3, e o resultado depende das respostas de 30 de outubro; por isso vamos confirmá-lo com um teste em condições de noite, com ruído e rede lenta. No gráfico, a planta do recinto é a funcionalidade mais escolhida, 53 %, logo seguida do botão de ajuda, 50 %; o assistente de perguntas é a última, 9 %. A barreira mais citada foi a bateria, 47 %.</a:t>
+              <a:t>(~75 s) Fizemos um inquérito no Google Forms entre 3 e 6 de outubro e a 30 de outubro, com 32 respostas válidas. Ficam 30 pessoas que já foram a um festival académico, a maioria à Queima do Porto. É pouco, o objetivo eram 100, e é uma amostra de conveniência, por isso os números mostram direção, não valores exatos. Três coisas: primeiro, 80 % esperou mais de meia hora para entrar, é de longe o problema mais comum. Segundo, 87 % diz que usaria a aplicação durante a noite, acima da meta de 60 %. Terceiro, a facilidade de encontrar informação teve média 2,97 em 5, mesmo no limite da meta de 3, e o resultado depende das respostas de 30 de outubro; por isso vamos confirmá-lo com um teste em condições de noite, com ruído e rede lenta. No gráfico, a planta do recinto é a funcionalidade mais escolhida, 52 %, logo seguida do botão de ajuda, 48 %; o assistente de perguntas é a última, 10 %. A barreira mais citada foi a bateria, 48 %.</a:t>
             </a:r>
             <a:endParaRPr lang="en-US" dirty="0"/>
           </a:p>
@@ -1909,7 +1909,7 @@
           <a:p>
             <a:r>
               <a:rPr lang="en-US" dirty="0"/>
-              <a:t>(~60 s) Do inquérito tirámos cinco decisões. Duas confirmam o que já tínhamos: a planta é o centro da aplicação, e a IA fica na triagem dos pedidos de ajuda e não num chatbot para participantes, que quase ninguém escolheu. Três mudam o backlog e estão propostas à equipa: o estado das entradas por porta sobe de Could para Should, porque a espera é o problema mais comum; a rede fraca e a bateria passam a ser restrições de desenho, com páginas leves, e o modo de rede fraca volta a ser discutido; e no pedido de ajuda a marcação na planta continua a funcionar sempre, mas a localização do telemóvel passa a ser um atalho opcional, porque 69 % aceita partilhá-la e quase todos os outros preferem marcar o sítio na planta. O pressuposto de que pedir ajuda pela app é mais rápido ainda não está validado: falta a entrevista ao voluntário de segurança.</a:t>
+              <a:t>(~60 s) Do inquérito tirámos cinco decisões. Duas confirmam o que já tínhamos: a planta é o centro da aplicação, e a IA fica na triagem dos pedidos de ajuda e não num chatbot para participantes, que quase ninguém escolheu. Três mudam o backlog: o estado das entradas por porta sobe de Could para Should, porque a espera é o problema mais comum; a bateria e a rede fraca passam a ser restrições de desenho, com páginas leves, e o modo de rede fraca volta a ser discutido; e no pedido de ajuda a aplicação pede a localização do telemóvel, que 71 % aceita partilhar, e quem recusar marca o sítio na planta. O pressuposto de que pedir ajuda pela app é mais rápido ainda não está validado: falta a entrevista ao voluntário de segurança.</a:t>
             </a:r>
             <a:endParaRPr lang="en-US" dirty="0"/>
           </a:p>
@@ -2085,7 +2085,7 @@
           <a:p>
             <a:r>
               <a:rPr lang="en-US" dirty="0"/>
-              <a:t>(~60 s) O percurso central é o pedido de ajuda. A Rita toca em Pedir ajuda; primeiro aparece o 112 e, se não for emergência, escolhe a categoria e marca o sítio na planta. O pedido fica guardado logo e aparece na sala de controlo em menos de 5 segundos. Em paralelo, a IA sugere categoria, prioridade e equipa em menos de 30 segundos; se a IA falhar, o pedido aparece como Não triado, e nada se perde. O Miguel confirma ou altera e encaminha para uma equipa. A Inês aceita no telemóvel, vai ao sítio marcado e fecha o pedido. A Rita acompanha o estado ao vivo. Em baixo estão os outros percursos: encontrar informação, criar e configurar um evento, publicar um aviso, reportar um problema e ganhar um badge, e o check-in.</a:t>
+              <a:t>(~60 s) O percurso central é o pedido de ajuda. A Rita toca em Pedir ajuda; primeiro aparece o 112 e, se não for emergência, escolhe a categoria e partilha a localização do telemóvel; se recusar, marca o sítio na planta. O pedido fica guardado logo e aparece na sala de controlo em menos de 5 segundos. Em paralelo, a IA sugere categoria, prioridade e equipa em menos de 30 segundos; se a IA falhar, o pedido aparece como Não triado, e nada se perde. O Miguel confirma ou altera e encaminha para uma equipa. A Inês aceita no telemóvel, vai ao sítio indicado e fecha o pedido. A Rita acompanha o estado ao vivo. Em baixo estão os outros percursos: encontrar informação, criar e configurar um evento, publicar um aviso, reportar um problema e ganhar um badge, e o check-in.</a:t>
             </a:r>
             <a:endParaRPr lang="en-US" dirty="0"/>
           </a:p>
@@ -3574,7 +3574,7 @@
                   <a:schemeClr val="accent3"/>
                 </a:solidFill>
               </a:rPr>
-              <a:t>Supported: 84 % say they would (intention)</a:t>
+              <a:t>Supported: 87 % say they would (intention)</a:t>
             </a:r>
             <a:endParaRPr lang="en-US" sz="1200" dirty="0"/>
           </a:p>
@@ -3724,7 +3724,7 @@
                   <a:schemeClr val="accent3"/>
                 </a:solidFill>
               </a:rPr>
-              <a:t>Partly: 38 % name installing as a barrier</a:t>
+              <a:t>Partly: 39 % name installing as a barrier</a:t>
             </a:r>
             <a:endParaRPr lang="en-US" sz="1200" dirty="0"/>
           </a:p>
@@ -5998,7 +5998,7 @@
                   <a:schemeClr val="accent3"/>
                 </a:solidFill>
               </a:rPr>
-              <a:t>* survey proposes moving up (team to confirm) · MoSCoW, then P0–P2 and XS–XL on the GitHub Projects board · features.md</a:t>
+              <a:t>* reviewed after the survey: F17 moves to Should, F11 back to planning · MoSCoW, then P0–P2 and XS–XL on the board</a:t>
             </a:r>
             <a:endParaRPr lang="en-US" sz="1100" dirty="0"/>
           </a:p>
@@ -10851,7 +10851,7 @@
                   <a:schemeClr val="bg1"/>
                 </a:solidFill>
               </a:rPr>
-              <a:t>Team confirms the survey changes to the backlog</a:t>
+              <a:t>Apply the survey changes to the backlog</a:t>
             </a:r>
             <a:endParaRPr lang="en-US" sz="1600" dirty="0"/>
           </a:p>
@@ -11260,7 +11260,7 @@
                   <a:schemeClr val="tx1"/>
                 </a:solidFill>
               </a:rPr>
-              <a:t>Find the map, entrances and transport home; ask for help with the place marked on the map.</a:t>
+              <a:t>Find the map, entrances and transport home; ask for help with their location, or a spot marked on the map.</a:t>
             </a:r>
             <a:endParaRPr lang="en-US" sz="1400" dirty="0"/>
           </a:p>
@@ -11738,7 +11738,7 @@
                   <a:schemeClr val="accent5"/>
                 </a:solidFill>
               </a:rPr>
-              <a:t>77 %</a:t>
+              <a:t>80 %</a:t>
             </a:r>
             <a:endParaRPr lang="en-US" sz="3200" dirty="0"/>
           </a:p>
@@ -11832,7 +11832,7 @@
                   <a:schemeClr val="accent4"/>
                 </a:solidFill>
               </a:rPr>
-              <a:t>84 %</a:t>
+              <a:t>87 %</a:t>
             </a:r>
             <a:endParaRPr lang="en-US" sz="3200" dirty="0"/>
           </a:p>
@@ -12014,7 +12014,7 @@
                   <a:schemeClr val="accent3"/>
                 </a:solidFill>
               </a:rPr>
-              <a:t>Google Forms, 3–6 and 30 Oct 2026 · 33 answers, n = 31 who have been to a festival · convenience sample</a:t>
+              <a:t>Google Forms, 3–6 and 30 Oct 2026 · 32 valid answers, n = 30 who have been to a festival · convenience sample</a:t>
             </a:r>
             <a:endParaRPr lang="en-US" sz="1100" dirty="0"/>
           </a:p>
@@ -12260,7 +12260,7 @@
                   <a:schemeClr val="accent3"/>
                 </a:solidFill>
               </a:rPr>
-              <a:t>Most chosen feature: 17 of 32</a:t>
+              <a:t>Most chosen feature: 16 of 31</a:t>
             </a:r>
             <a:endParaRPr lang="en-US" sz="1200" dirty="0"/>
           </a:p>
@@ -12456,7 +12456,7 @@
                   <a:schemeClr val="accent3"/>
                 </a:solidFill>
               </a:rPr>
-              <a:t>24 of 31 waited &gt; 30 min to get in</a:t>
+              <a:t>24 of 30 waited &gt; 30 min to get in</a:t>
             </a:r>
             <a:endParaRPr lang="en-US" sz="1200" dirty="0"/>
           </a:p>
@@ -12514,7 +12514,7 @@
                   <a:schemeClr val="tx2"/>
                 </a:solidFill>
               </a:rPr>
-              <a:t>Proposed</a:t>
+              <a:t>Decided</a:t>
             </a:r>
             <a:endParaRPr lang="en-US" sz="1100" dirty="0"/>
           </a:p>
@@ -12652,7 +12652,7 @@
                   <a:schemeClr val="accent3"/>
                 </a:solidFill>
               </a:rPr>
-              <a:t>Battery 15 of 32, network 10 of 32</a:t>
+              <a:t>Battery 15 of 31, network 10 of 31</a:t>
             </a:r>
             <a:endParaRPr lang="en-US" sz="1200" dirty="0"/>
           </a:p>
@@ -12710,7 +12710,7 @@
                   <a:schemeClr val="tx2"/>
                 </a:solidFill>
               </a:rPr>
-              <a:t>Proposed</a:t>
+              <a:t>Decided</a:t>
             </a:r>
             <a:endParaRPr lang="en-US" sz="1100" dirty="0"/>
           </a:p>
@@ -12812,7 +12812,7 @@
                   <a:schemeClr val="tx2"/>
                 </a:solidFill>
               </a:rPr>
-              <a:t>Help: map pin always, phone location optional</a:t>
+              <a:t>Help: phone location first, map as fallback</a:t>
             </a:r>
             <a:endParaRPr lang="en-US" sz="1500" dirty="0"/>
           </a:p>
@@ -12848,7 +12848,7 @@
                   <a:schemeClr val="accent3"/>
                 </a:solidFill>
               </a:rPr>
-              <a:t>22 of 32 share GPS, 9 only the pin</a:t>
+              <a:t>22 of 31 share GPS, 8 only the map</a:t>
             </a:r>
             <a:endParaRPr lang="en-US" sz="1200" dirty="0"/>
           </a:p>
@@ -12906,7 +12906,7 @@
                   <a:schemeClr val="tx2"/>
                 </a:solidFill>
               </a:rPr>
-              <a:t>Proposed</a:t>
+              <a:t>Decided</a:t>
             </a:r>
             <a:endParaRPr lang="en-US" sz="1100" dirty="0"/>
           </a:p>
@@ -13044,7 +13044,7 @@
                   <a:schemeClr val="accent3"/>
                 </a:solidFill>
               </a:rPr>
-              <a:t>Assistant chosen by 3 of 32</a:t>
+              <a:t>Assistant chosen by 3 of 31</a:t>
             </a:r>
             <a:endParaRPr lang="en-US" sz="1200" dirty="0"/>
           </a:p>
@@ -13138,7 +13138,7 @@
                   <a:schemeClr val="accent3"/>
                 </a:solidFill>
               </a:rPr>
-              <a:t>Proposed changes go to the backlog after the team confirms them · A4 (help is faster) waits for the security-volunteer interview</a:t>
+              <a:t>Backlog changes applied at the next planning · A4 (help is faster) waits for the security-volunteer interview</a:t>
             </a:r>
             <a:endParaRPr lang="en-US" sz="1100" dirty="0"/>
           </a:p>
@@ -14614,7 +14614,7 @@
                   <a:schemeClr val="tx1"/>
                 </a:solidFill>
               </a:rPr>
-              <a:t>Asks for help: category and the spot on the map (112 shown first)</a:t>
+              <a:t>Asks for help: category and her phone location, or a spot on the map (112 first)</a:t>
             </a:r>
             <a:endParaRPr lang="en-US" sz="1200" dirty="0"/>
           </a:p>

--- a/Docs/Presentation/Farol_Sprint_A_Presentation.pptx
+++ b/Docs/Presentation/Farol_Sprint_A_Presentation.pptx
@@ -124,12 +124,12 @@
   <p:extLst>
     <p:ext uri="{521415D9-36F7-43E2-AB2F-B90AF26B5E84}">
       <p14:sectionLst xmlns:p14="http://schemas.microsoft.com/office/powerpoint/2010/main">
-        <p14:section name="Opening" id="{e7b5d382-112e-55e4-9f3f-ec4adb3b9acc}">
+        <p14:section name="Opening" id="{4180bb3a-e06e-3cb4-8259-dd9152db3c56}">
           <p14:sldIdLst>
             <p14:sldId id="256"/>
           </p14:sldIdLst>
         </p14:section>
-        <p14:section name="Product" id="{184b4c8b-7c6c-6c76-b760-5958322696a2}">
+        <p14:section name="Product" id="{2bb0c058-a98c-663f-b1db-1b1f314679d1}">
           <p14:sldIdLst>
             <p14:sldId id="257"/>
             <p14:sldId id="258"/>
@@ -138,7 +138,7 @@
             <p14:sldId id="261"/>
           </p14:sldIdLst>
         </p14:section>
-        <p14:section name="Design" id="{288eb3a8-013b-d5ec-57a2-8a646247092a}">
+        <p14:section name="Design" id="{44c0aea5-c14f-0563-c601-84f6af1bf2de}">
           <p14:sldIdLst>
             <p14:sldId id="262"/>
             <p14:sldId id="263"/>
@@ -146,7 +146,7 @@
             <p14:sldId id="265"/>
           </p14:sldIdLst>
         </p14:section>
-        <p14:section name="Plan" id="{52a9c346-c652-72e7-517a-59a719764e94}">
+        <p14:section name="Plan" id="{8233a9d8-be00-77fc-2851-2714e7106e00}">
           <p14:sldIdLst>
             <p14:sldId id="266"/>
             <p14:sldId id="267"/>
@@ -154,14 +154,14 @@
             <p14:sldId id="269"/>
           </p14:sldIdLst>
         </p14:section>
-        <p14:section name="Team" id="{abeefc53-192b-898c-490d-bc4199dd3b23}">
+        <p14:section name="Team" id="{18886c6f-e2e8-fe7e-5118-b3c0e591fff1}">
           <p14:sldIdLst>
             <p14:sldId id="270"/>
             <p14:sldId id="271"/>
             <p14:sldId id="272"/>
           </p14:sldIdLst>
         </p14:section>
-        <p14:section name="Closing" id="{7e9be91b-49f2-49c9-cd0b-d78e89aa4f39}">
+        <p14:section name="Closing" id="{eba572aa-79f9-216e-bd35-e4ad85e9cc00}">
           <p14:sldIdLst>
             <p14:sldId id="273"/>
           </p14:sldIdLst>
@@ -1117,7 +1117,7 @@
           <a:p>
             <a:r>
               <a:rPr lang="en-US" dirty="0"/>
-              <a:t>(~50 s) O backlog tem 20 funcionalidades, priorizadas com MoSCoW, e 62 user stories no board do GitHub Projects, com prioridade P0 a P2 e tamanho. As Must cobrem o percurso principal: login, eventos, papéis e equipas, a planta, o pedido de ajuda, o backoffice de incidentes, a triagem com IA, os transportes do Porto Digital, os avisos, e os reports com confirmação e badges, que são o nosso mecanismo de envolvimento ético. Should: badges de presença e check-in. Could: modo de rede fraca, estado das entradas e amigos; as duas primeiras, com asterisco, o inquérito propõe subir. Won't nesta versão: chat e ligação ao bilhete.</a:t>
+              <a:t>(~50 s) O backlog tem 20 funcionalidades, priorizadas com MoSCoW, e 62 user stories no board do GitHub Projects, com prioridade P0 a P2 e tamanho. As Must cobrem o percurso principal: login, eventos, papéis e equipas, a planta, o pedido de ajuda, o backoffice de incidentes, a triagem com IA, os transportes do Porto Digital, os avisos, e os reports com confirmação e badges, que são o nosso mecanismo de envolvimento ético. Should: badges de presença, check-in e, depois do inquérito, o estado das entradas, porque a espera é o problema mais comum. Could: modo de rede fraca e amigos; o modo de rede fraca, com asterisco, volta a ser discutido no planeamento como candidato a Should. Won't nesta versão: chat e ligação ao bilhete.</a:t>
             </a:r>
             <a:endParaRPr lang="en-US" dirty="0"/>
           </a:p>
@@ -1645,7 +1645,7 @@
           <a:p>
             <a:r>
               <a:rPr lang="en-US" dirty="0"/>
-              <a:t>(~30 s) Próximos passos: pôr o walking skeleton a correr antes de 2 de novembro; fazer a entrevista ao voluntário de segurança para validar o pressuposto A4 e as personas do Miguel e da Inês; aplicar ao backlog as mudanças que o inquérito trouxe, no próximo planeamento; e entregar a fatia vertical a 6 de dezembro. Obrigado, ficamos para perguntas.</a:t>
+              <a:t>(~30 s) Próximos passos: pôr o walking skeleton a correr antes de 2 de novembro; fazer a entrevista ao voluntário de segurança para validar o pressuposto A4 e as personas do Miguel e da Inês; decidir no próximo planeamento se o modo de rede fraca sobe para Should, como o inquérito sugere; e entregar a fatia vertical a 6 de dezembro. Obrigado, ficamos para perguntas.</a:t>
             </a:r>
             <a:endParaRPr lang="en-US" dirty="0"/>
           </a:p>
@@ -5677,6 +5677,23 @@
             </a:r>
             <a:endParaRPr lang="en-US" sz="1200" dirty="0"/>
           </a:p>
+          <a:p>
+            <a:pPr indent="0" marL="0">
+              <a:spcAft>
+                <a:spcPts val="600"/>
+              </a:spcAft>
+              <a:buNone/>
+            </a:pPr>
+            <a:r>
+              <a:rPr lang="en-US" sz="1200" dirty="0">
+                <a:solidFill>
+                  <a:schemeClr val="tx1"/>
+                </a:solidFill>
+              </a:rPr>
+              <a:t>F17 Entrance status *</a:t>
+            </a:r>
+            <a:endParaRPr lang="en-US" sz="1200" dirty="0"/>
+          </a:p>
         </p:txBody>
       </p:sp>
       <p:sp>
@@ -5809,10 +5826,112 @@
                   <a:schemeClr val="tx1"/>
                 </a:solidFill>
               </a:rPr>
-              <a:t>F17 Entrance status *</a:t>
+              <a:t>F18 Friends</a:t>
             </a:r>
             <a:endParaRPr lang="en-US" sz="1200" dirty="0"/>
           </a:p>
+        </p:txBody>
+      </p:sp>
+      <p:sp>
+        <p:nvSpPr>
+          <p:cNvPr id="16" name="Shape 14"/>
+          <p:cNvSpPr/>
+          <p:nvPr/>
+        </p:nvSpPr>
+        <p:spPr>
+          <a:xfrm>
+            <a:off x="7178040" y="1005840"/>
+            <a:ext cx="1508760" cy="411480"/>
+          </a:xfrm>
+          <a:prstGeom prst="roundRect">
+            <a:avLst>
+              <a:gd name="adj" fmla="val 17778"/>
+            </a:avLst>
+          </a:prstGeom>
+          <a:solidFill>
+            <a:schemeClr val="accent3"/>
+          </a:solidFill>
+          <a:ln/>
+        </p:spPr>
+      </p:sp>
+      <p:sp>
+        <p:nvSpPr>
+          <p:cNvPr id="17" name="Text 15"/>
+          <p:cNvSpPr txBox="1"/>
+          <p:nvPr/>
+        </p:nvSpPr>
+        <p:spPr>
+          <a:xfrm>
+            <a:off x="7178040" y="1005840"/>
+            <a:ext cx="1508760" cy="411480"/>
+          </a:xfrm>
+          <a:prstGeom prst="rect">
+            <a:avLst/>
+          </a:prstGeom>
+          <a:noFill/>
+          <a:ln/>
+        </p:spPr>
+        <p:txBody>
+          <a:bodyPr wrap="square" lIns="0" tIns="0" rIns="0" bIns="0" rtlCol="0" anchor="ctr"/>
+          <a:lstStyle/>
+          <a:p>
+            <a:pPr algn="ctr" indent="0" marL="0">
+              <a:buNone/>
+            </a:pPr>
+            <a:r>
+              <a:rPr lang="en-US" sz="1500" b="1" dirty="0">
+                <a:solidFill>
+                  <a:schemeClr val="bg1"/>
+                </a:solidFill>
+              </a:rPr>
+              <a:t>Won't (now)</a:t>
+            </a:r>
+            <a:endParaRPr lang="en-US" sz="1500" dirty="0"/>
+          </a:p>
+        </p:txBody>
+      </p:sp>
+      <p:sp>
+        <p:nvSpPr>
+          <p:cNvPr id="18" name="Shape 16"/>
+          <p:cNvSpPr/>
+          <p:nvPr/>
+        </p:nvSpPr>
+        <p:spPr>
+          <a:xfrm>
+            <a:off x="7178040" y="1508760"/>
+            <a:ext cx="1508760" cy="2971800"/>
+          </a:xfrm>
+          <a:prstGeom prst="roundRect">
+            <a:avLst>
+              <a:gd name="adj" fmla="val 7273"/>
+            </a:avLst>
+          </a:prstGeom>
+          <a:solidFill>
+            <a:schemeClr val="bg2"/>
+          </a:solidFill>
+          <a:ln/>
+        </p:spPr>
+      </p:sp>
+      <p:sp>
+        <p:nvSpPr>
+          <p:cNvPr id="19" name="Text 17"/>
+          <p:cNvSpPr txBox="1"/>
+          <p:nvPr/>
+        </p:nvSpPr>
+        <p:spPr>
+          <a:xfrm>
+            <a:off x="7287768" y="1627632"/>
+            <a:ext cx="1289304" cy="2743200"/>
+          </a:xfrm>
+          <a:prstGeom prst="rect">
+            <a:avLst/>
+          </a:prstGeom>
+          <a:noFill/>
+          <a:ln/>
+        </p:spPr>
+        <p:txBody>
+          <a:bodyPr wrap="square" lIns="0" tIns="0" rIns="0" bIns="0" rtlCol="0" anchor="t"/>
+          <a:lstStyle/>
           <a:p>
             <a:pPr indent="0" marL="0">
               <a:spcAft>
@@ -5826,112 +5945,10 @@
                   <a:schemeClr val="tx1"/>
                 </a:solidFill>
               </a:rPr>
-              <a:t>F18 Friends</a:t>
+              <a:t>F19 Chat</a:t>
             </a:r>
             <a:endParaRPr lang="en-US" sz="1200" dirty="0"/>
           </a:p>
-        </p:txBody>
-      </p:sp>
-      <p:sp>
-        <p:nvSpPr>
-          <p:cNvPr id="16" name="Shape 14"/>
-          <p:cNvSpPr/>
-          <p:nvPr/>
-        </p:nvSpPr>
-        <p:spPr>
-          <a:xfrm>
-            <a:off x="7178040" y="1005840"/>
-            <a:ext cx="1508760" cy="411480"/>
-          </a:xfrm>
-          <a:prstGeom prst="roundRect">
-            <a:avLst>
-              <a:gd name="adj" fmla="val 17778"/>
-            </a:avLst>
-          </a:prstGeom>
-          <a:solidFill>
-            <a:schemeClr val="accent3"/>
-          </a:solidFill>
-          <a:ln/>
-        </p:spPr>
-      </p:sp>
-      <p:sp>
-        <p:nvSpPr>
-          <p:cNvPr id="17" name="Text 15"/>
-          <p:cNvSpPr txBox="1"/>
-          <p:nvPr/>
-        </p:nvSpPr>
-        <p:spPr>
-          <a:xfrm>
-            <a:off x="7178040" y="1005840"/>
-            <a:ext cx="1508760" cy="411480"/>
-          </a:xfrm>
-          <a:prstGeom prst="rect">
-            <a:avLst/>
-          </a:prstGeom>
-          <a:noFill/>
-          <a:ln/>
-        </p:spPr>
-        <p:txBody>
-          <a:bodyPr wrap="square" lIns="0" tIns="0" rIns="0" bIns="0" rtlCol="0" anchor="ctr"/>
-          <a:lstStyle/>
-          <a:p>
-            <a:pPr algn="ctr" indent="0" marL="0">
-              <a:buNone/>
-            </a:pPr>
-            <a:r>
-              <a:rPr lang="en-US" sz="1500" b="1" dirty="0">
-                <a:solidFill>
-                  <a:schemeClr val="bg1"/>
-                </a:solidFill>
-              </a:rPr>
-              <a:t>Won't (now)</a:t>
-            </a:r>
-            <a:endParaRPr lang="en-US" sz="1500" dirty="0"/>
-          </a:p>
-        </p:txBody>
-      </p:sp>
-      <p:sp>
-        <p:nvSpPr>
-          <p:cNvPr id="18" name="Shape 16"/>
-          <p:cNvSpPr/>
-          <p:nvPr/>
-        </p:nvSpPr>
-        <p:spPr>
-          <a:xfrm>
-            <a:off x="7178040" y="1508760"/>
-            <a:ext cx="1508760" cy="2971800"/>
-          </a:xfrm>
-          <a:prstGeom prst="roundRect">
-            <a:avLst>
-              <a:gd name="adj" fmla="val 7273"/>
-            </a:avLst>
-          </a:prstGeom>
-          <a:solidFill>
-            <a:schemeClr val="bg2"/>
-          </a:solidFill>
-          <a:ln/>
-        </p:spPr>
-      </p:sp>
-      <p:sp>
-        <p:nvSpPr>
-          <p:cNvPr id="19" name="Text 17"/>
-          <p:cNvSpPr txBox="1"/>
-          <p:nvPr/>
-        </p:nvSpPr>
-        <p:spPr>
-          <a:xfrm>
-            <a:off x="7287768" y="1627632"/>
-            <a:ext cx="1289304" cy="2743200"/>
-          </a:xfrm>
-          <a:prstGeom prst="rect">
-            <a:avLst/>
-          </a:prstGeom>
-          <a:noFill/>
-          <a:ln/>
-        </p:spPr>
-        <p:txBody>
-          <a:bodyPr wrap="square" lIns="0" tIns="0" rIns="0" bIns="0" rtlCol="0" anchor="t"/>
-          <a:lstStyle/>
           <a:p>
             <a:pPr indent="0" marL="0">
               <a:spcAft>
@@ -5945,23 +5962,6 @@
                   <a:schemeClr val="tx1"/>
                 </a:solidFill>
               </a:rPr>
-              <a:t>F19 Chat</a:t>
-            </a:r>
-            <a:endParaRPr lang="en-US" sz="1200" dirty="0"/>
-          </a:p>
-          <a:p>
-            <a:pPr indent="0" marL="0">
-              <a:spcAft>
-                <a:spcPts val="600"/>
-              </a:spcAft>
-              <a:buNone/>
-            </a:pPr>
-            <a:r>
-              <a:rPr lang="en-US" sz="1200" dirty="0">
-                <a:solidFill>
-                  <a:schemeClr val="tx1"/>
-                </a:solidFill>
-              </a:rPr>
               <a:t>F20 Ticket link</a:t>
             </a:r>
             <a:endParaRPr lang="en-US" sz="1200" dirty="0"/>
@@ -5998,7 +5998,7 @@
                   <a:schemeClr val="accent3"/>
                 </a:solidFill>
               </a:rPr>
-              <a:t>* reviewed after the survey: F17 moves to Should, F11 back to planning · MoSCoW, then P0–P2 and XS–XL on the board</a:t>
+              <a:t>* changed after the survey: F17 up to Should; F11 a candidate for Should · MoSCoW, then P0–P2 and XS–XL on the board</a:t>
             </a:r>
             <a:endParaRPr lang="en-US" sz="1100" dirty="0"/>
           </a:p>
@@ -10851,7 +10851,7 @@
                   <a:schemeClr val="bg1"/>
                 </a:solidFill>
               </a:rPr>
-              <a:t>Apply the survey changes to the backlog</a:t>
+              <a:t>Decide on weak-network mode (F11) after the survey</a:t>
             </a:r>
             <a:endParaRPr lang="en-US" sz="1600" dirty="0"/>
           </a:p>
@@ -13138,7 +13138,7 @@
                   <a:schemeClr val="accent3"/>
                 </a:solidFill>
               </a:rPr>
-              <a:t>Backlog changes applied at the next planning · A4 (help is faster) waits for the security-volunteer interview</a:t>
+              <a:t>Backlog changes applied in features.md on 30 Oct · A4 (help is faster) waits for the security-volunteer interview</a:t>
             </a:r>
             <a:endParaRPr lang="en-US" sz="1100" dirty="0"/>
           </a:p>

--- a/Docs/Presentation/Farol_Sprint_A_Presentation.pptx
+++ b/Docs/Presentation/Farol_Sprint_A_Presentation.pptx
@@ -124,12 +124,12 @@
   <p:extLst>
     <p:ext uri="{521415D9-36F7-43E2-AB2F-B90AF26B5E84}">
       <p14:sectionLst xmlns:p14="http://schemas.microsoft.com/office/powerpoint/2010/main">
-        <p14:section name="Opening" id="{4180bb3a-e06e-3cb4-8259-dd9152db3c56}">
+        <p14:section name="Opening" id="{f18a03a8-203b-e953-6ae5-78fab7fdbd35}">
           <p14:sldIdLst>
             <p14:sldId id="256"/>
           </p14:sldIdLst>
         </p14:section>
-        <p14:section name="Product" id="{2bb0c058-a98c-663f-b1db-1b1f314679d1}">
+        <p14:section name="Product" id="{1e8b1d06-d22e-02f5-7898-d6a2675f3c62}">
           <p14:sldIdLst>
             <p14:sldId id="257"/>
             <p14:sldId id="258"/>
@@ -138,7 +138,7 @@
             <p14:sldId id="261"/>
           </p14:sldIdLst>
         </p14:section>
-        <p14:section name="Design" id="{44c0aea5-c14f-0563-c601-84f6af1bf2de}">
+        <p14:section name="Design" id="{251047b5-e642-31be-a66e-6ebf8800e96c}">
           <p14:sldIdLst>
             <p14:sldId id="262"/>
             <p14:sldId id="263"/>
@@ -146,7 +146,7 @@
             <p14:sldId id="265"/>
           </p14:sldIdLst>
         </p14:section>
-        <p14:section name="Plan" id="{8233a9d8-be00-77fc-2851-2714e7106e00}">
+        <p14:section name="Plan" id="{439c860b-81d8-b573-8ec7-0afdb6a645b3}">
           <p14:sldIdLst>
             <p14:sldId id="266"/>
             <p14:sldId id="267"/>
@@ -154,14 +154,14 @@
             <p14:sldId id="269"/>
           </p14:sldIdLst>
         </p14:section>
-        <p14:section name="Team" id="{18886c6f-e2e8-fe7e-5118-b3c0e591fff1}">
+        <p14:section name="Team" id="{a1bb1ef4-437e-3bac-b9a7-75a259ffba5d}">
           <p14:sldIdLst>
             <p14:sldId id="270"/>
             <p14:sldId id="271"/>
             <p14:sldId id="272"/>
           </p14:sldIdLst>
         </p14:section>
-        <p14:section name="Closing" id="{eba572aa-79f9-216e-bd35-e4ad85e9cc00}">
+        <p14:section name="Closing" id="{e5664093-db36-aefc-0dc2-2f322c4fef6a}">
           <p14:sldIdLst>
             <p14:sldId id="273"/>
           </p14:sldIdLst>
@@ -1293,7 +1293,7 @@
           <a:p>
             <a:r>
               <a:rPr lang="en-US" dirty="0"/>
-              <a:t>(~50 s) O plano de entregas. Antes de 2 de novembro, o walking skeleton: um endpoint, um teste, um Dockerfile e o pipeline, a correr localmente. O Sprint B, de 2 de novembro a 6 de dezembro, entrega a fatia vertical: um participante pede ajuda na planta, a sala de controlo vê o pedido com a sugestão da IA, ou sem ela se a IA falhar, e encaminha para uma equipa que o aceita e resolve. São 27 stories. O Sprint C, até 3 de janeiro, completa o MVP: contas, transportes com shuttles e o aviso do modo degradado, avisos, reports e badges, e a avaliação da IA contra a alternativa sem IA. Se o tempo apertar, já temos definido o que cai primeiro.</a:t>
+              <a:t>(~50 s) O plano de entregas. O walking skeleton já está feito, a 31 de outubro: o serviço Reports cria e lê pedidos de ajuda sintéticos, com health check, testes HTTP, Dockerfile, Docker Compose e um smoke test no CI. O Sprint B, de 2 de novembro a 6 de dezembro, entrega a fatia vertical: um participante pede ajuda na planta, a sala de controlo vê o pedido com a sugestão da IA, ou sem ela se a IA falhar, e encaminha para uma equipa que o aceita e resolve. São 27 stories. O Sprint C, até 3 de janeiro, completa o MVP: contas, transportes com shuttles e o aviso do modo degradado, avisos, reports e badges, e a avaliação da IA contra a alternativa sem IA. Se o tempo apertar, já temos definido o que cai primeiro.</a:t>
             </a:r>
             <a:endParaRPr lang="en-US" dirty="0"/>
           </a:p>
@@ -1645,7 +1645,7 @@
           <a:p>
             <a:r>
               <a:rPr lang="en-US" dirty="0"/>
-              <a:t>(~30 s) Próximos passos: pôr o walking skeleton a correr antes de 2 de novembro; fazer a entrevista ao voluntário de segurança para validar o pressuposto A4 e as personas do Miguel e da Inês; decidir no próximo planeamento se o modo de rede fraca sobe para Should, como o inquérito sugere; e entregar a fatia vertical a 6 de dezembro. Obrigado, ficamos para perguntas.</a:t>
+              <a:t>(~30 s) Próximos passos: o Sprint B começa a 2 de novembro, a partir do walking skeleton que já está a correr; fazer a entrevista ao voluntário de segurança para validar o pressuposto A4 e as personas do Miguel e da Inês; decidir no próximo planeamento se o modo de rede fraca sobe para Should, como o inquérito sugere; e entregar a fatia vertical a 6 de dezembro. Obrigado, ficamos para perguntas.</a:t>
             </a:r>
             <a:endParaRPr lang="en-US" dirty="0"/>
           </a:p>
@@ -2261,7 +2261,7 @@
           <a:p>
             <a:r>
               <a:rPr lang="en-US" dirty="0"/>
-              <a:t>(~75 s) A arquitetura. Há uma única aplicação web em React, com páginas pensadas para o telemóvel ou para o portátil. Tudo entra pelo API gateway, que valida o token do Keycloak, aplica CORS e limites por conta. Atrás há cinco microserviços em Spring Boot, cada um com a sua base de dados PostgreSQL e o seu Dockerfile, desde o Sprint A. Os serviços não chamam a API uns dos outros: comunicam só por eventos no RabbitMQ, com tabela de outbox, consumidores idempotentes e filas de dead letter, por isso nenhum pedido se perde. A triagem é o fluxo assíncrono: o Reports publica o pedido e o worker chama o modelo local, Ollama com qwen3 de 4 mil milhões de parâmetros. A integração externa é a API de autocarros do Porto Digital, com o WireMock para testes e para a demo. Os dois modos degradados: sem IA, o pedido aparece como Não triado; sem transportes, mostramos os últimos dados válidos com aviso. Tudo corre localmente com Docker Compose, com autorização do professor por causa dos custos.</a:t>
+              <a:t>(~75 s) A arquitetura. Há uma única aplicação web em React, com páginas pensadas para o telemóvel ou para o portátil. Tudo entra pelo API gateway, que valida o token do Keycloak, aplica CORS e limites por conta. Atrás há cinco microserviços em Spring Boot, cada um com a sua base de dados PostgreSQL e o seu Dockerfile, desde o Sprint A. Os serviços não chamam a API uns dos outros: comunicam só por eventos no RabbitMQ, com tabela de outbox, consumidores idempotentes e filas de dead letter, por isso nenhum pedido se perde. A triagem é o fluxo assíncrono: o Reports publica o pedido e o worker chama o modelo local, Ollama com qwen3 de 4 mil milhões de parâmetros, através do WireMock, que também serve para simular falhas. A integração externa é a API de autocarros do Porto Digital, com o WireMock para testes e para a demo. Os dois modos degradados: sem IA, o pedido aparece como Não triado; sem transportes, mostramos os últimos dados válidos com aviso. Tudo corre localmente com Docker Compose, com autorização do professor por causa dos custos.</a:t>
             </a:r>
             <a:endParaRPr lang="en-US" dirty="0"/>
           </a:p>
@@ -2349,7 +2349,7 @@
           <a:p>
             <a:r>
               <a:rPr lang="en-US" dirty="0"/>
-              <a:t>(~45 s) A stack: Java 21 com Spring Boot 4 no backend, uma aplicação React no frontend, PostgreSQL com Flyway, RabbitMQ para mensagens, Keycloak para identidade e Spring Cloud Gateway à entrada. A entrega usa GitHub Actions e Docker Compose, e os testes de carga usam k6. Todas as decisões estão em 13 ADRs, cada um com a escolha, as alternativas e o porquê. Dois ainda estão Propostos: o fornecedor de IA e a observabilidade, que fecham com a revisão da equipa.</a:t>
+              <a:t>(~45 s) A stack: Java 21 com Spring Boot 4 no backend, uma aplicação React no frontend, PostgreSQL com Flyway, RabbitMQ para mensagens, Keycloak para identidade e Spring Cloud Gateway à entrada. A entrega usa GitHub Actions, com análise de qualidade no SonarQube Cloud, e Docker Compose, e os testes de carga usam k6. Todas as decisões estão em 13 ADRs, cada um com a escolha, as alternativas e o porquê. Estão todos aceites; nos da IA e da observabilidade falta ainda a evidência a correr, que chega com o Sprint B.</a:t>
             </a:r>
             <a:endParaRPr lang="en-US" dirty="0"/>
           </a:p>
@@ -7251,7 +7251,7 @@
                   <a:schemeClr val="accent2"/>
                 </a:solidFill>
               </a:rPr>
-              <a:t>before 2 Nov</a:t>
+              <a:t>done 31 Oct</a:t>
             </a:r>
             <a:endParaRPr lang="en-US" sz="1200" dirty="0"/>
           </a:p>
@@ -7287,7 +7287,7 @@
                   <a:schemeClr val="tx1"/>
                 </a:solidFill>
               </a:rPr>
-              <a:t>One endpoint, one test, a Dockerfile and the pipeline, running locally</a:t>
+              <a:t>Reports service: creates and reads synthetic help requests, with health check, HTTP tests, Dockerfile, Compose and CI smoke test</a:t>
             </a:r>
             <a:endParaRPr lang="en-US" sz="1200" dirty="0"/>
           </a:p>
@@ -10667,7 +10667,7 @@
                   <a:schemeClr val="bg1"/>
                 </a:solidFill>
               </a:rPr>
-              <a:t>Walking skeleton (R0) running locally</a:t>
+              <a:t>Sprint B starts from the walking skeleton</a:t>
             </a:r>
             <a:endParaRPr lang="en-US" sz="1600" dirty="0"/>
           </a:p>
@@ -10703,7 +10703,7 @@
                   <a:schemeClr val="accent1"/>
                 </a:solidFill>
               </a:rPr>
-              <a:t>before 2 Nov</a:t>
+              <a:t>2 Nov</a:t>
             </a:r>
             <a:endParaRPr lang="en-US" sz="1400" dirty="0"/>
           </a:p>
@@ -18829,7 +18829,7 @@
                   <a:schemeClr val="tx2"/>
                 </a:solidFill>
               </a:rPr>
-              <a:t>AI triage, called</a:t>
+              <a:t>via WireMock, called</a:t>
             </a:r>
             <a:endParaRPr lang="en-US" sz="1000" dirty="0"/>
           </a:p>
@@ -20047,7 +20047,21 @@
                   <a:schemeClr val="tx1"/>
                 </a:solidFill>
               </a:rPr>
-              <a:t>GitHub Actions · Docker Compose · k6</a:t>
+              <a:t>Actions · SonarQube</a:t>
+            </a:r>
+            <a:endParaRPr lang="en-US" sz="1200" dirty="0"/>
+          </a:p>
+          <a:p>
+            <a:pPr indent="0" marL="0">
+              <a:buNone/>
+            </a:pPr>
+            <a:r>
+              <a:rPr lang="en-US" sz="1200" dirty="0">
+                <a:solidFill>
+                  <a:schemeClr val="tx1"/>
+                </a:solidFill>
+              </a:rPr>
+              <a:t>Compose · k6</a:t>
             </a:r>
             <a:endParaRPr lang="en-US" sz="1200" dirty="0"/>
           </a:p>
@@ -20212,7 +20226,7 @@
                   <a:schemeClr val="bg1"/>
                 </a:solidFill>
               </a:rPr>
-              <a:t>005 AI triage provider (Proposed)</a:t>
+              <a:t>005 AI triage: local Ollama</a:t>
             </a:r>
             <a:endParaRPr lang="en-US" sz="1100" dirty="0"/>
           </a:p>
@@ -20331,7 +20345,7 @@
                   <a:schemeClr val="bg1"/>
                 </a:solidFill>
               </a:rPr>
-              <a:t>012 Observability (Proposed)</a:t>
+              <a:t>012 Observability: Prometheus, Grafana</a:t>
             </a:r>
             <a:endParaRPr lang="en-US" sz="1100" dirty="0"/>
           </a:p>

--- a/Docs/Presentation/Farol_Sprint_A_Presentation.pptx
+++ b/Docs/Presentation/Farol_Sprint_A_Presentation.pptx
@@ -124,12 +124,12 @@
   <p:extLst>
     <p:ext uri="{521415D9-36F7-43E2-AB2F-B90AF26B5E84}">
       <p14:sectionLst xmlns:p14="http://schemas.microsoft.com/office/powerpoint/2010/main">
-        <p14:section name="Opening" id="{f18a03a8-203b-e953-6ae5-78fab7fdbd35}">
+        <p14:section name="Opening" id="{8caf8f23-3048-a462-1b6b-8852486b0395}">
           <p14:sldIdLst>
             <p14:sldId id="256"/>
           </p14:sldIdLst>
         </p14:section>
-        <p14:section name="Product" id="{1e8b1d06-d22e-02f5-7898-d6a2675f3c62}">
+        <p14:section name="Product" id="{0ed65b43-ed74-7b4d-ba5a-185f421e25bf}">
           <p14:sldIdLst>
             <p14:sldId id="257"/>
             <p14:sldId id="258"/>
@@ -138,7 +138,7 @@
             <p14:sldId id="261"/>
           </p14:sldIdLst>
         </p14:section>
-        <p14:section name="Design" id="{251047b5-e642-31be-a66e-6ebf8800e96c}">
+        <p14:section name="Design" id="{27800aa2-b1a1-0314-9798-b1adda926b5e}">
           <p14:sldIdLst>
             <p14:sldId id="262"/>
             <p14:sldId id="263"/>
@@ -146,7 +146,7 @@
             <p14:sldId id="265"/>
           </p14:sldIdLst>
         </p14:section>
-        <p14:section name="Plan" id="{439c860b-81d8-b573-8ec7-0afdb6a645b3}">
+        <p14:section name="Plan" id="{a51a2b36-4e5f-146a-4e98-265bd08e512f}">
           <p14:sldIdLst>
             <p14:sldId id="266"/>
             <p14:sldId id="267"/>
@@ -154,14 +154,14 @@
             <p14:sldId id="269"/>
           </p14:sldIdLst>
         </p14:section>
-        <p14:section name="Team" id="{a1bb1ef4-437e-3bac-b9a7-75a259ffba5d}">
+        <p14:section name="Team" id="{bbf90b3d-cc83-282f-dbf8-9d0d27506586}">
           <p14:sldIdLst>
             <p14:sldId id="270"/>
             <p14:sldId id="271"/>
             <p14:sldId id="272"/>
           </p14:sldIdLst>
         </p14:section>
-        <p14:section name="Closing" id="{e5664093-db36-aefc-0dc2-2f322c4fef6a}">
+        <p14:section name="Closing" id="{63f182c1-69f6-ecb0-3588-b1b205717527}">
           <p14:sldIdLst>
             <p14:sldId id="273"/>
           </p14:sldIdLst>
@@ -1293,7 +1293,7 @@
           <a:p>
             <a:r>
               <a:rPr lang="en-US" dirty="0"/>
-              <a:t>(~50 s) O plano de entregas. O walking skeleton já está feito, a 31 de outubro: o serviço Reports cria e lê pedidos de ajuda sintéticos, com health check, testes HTTP, Dockerfile, Docker Compose e um smoke test no CI. O Sprint B, de 2 de novembro a 6 de dezembro, entrega a fatia vertical: um participante pede ajuda na planta, a sala de controlo vê o pedido com a sugestão da IA, ou sem ela se a IA falhar, e encaminha para uma equipa que o aceita e resolve. São 27 stories. O Sprint C, até 3 de janeiro, completa o MVP: contas, transportes com shuttles e o aviso do modo degradado, avisos, reports e badges, e a avaliação da IA contra a alternativa sem IA. Se o tempo apertar, já temos definido o que cai primeiro.</a:t>
+              <a:t>(~50 s) O plano de entregas. O walking skeleton já está feito, a 31 de outubro: o serviço Reports cria e lê pedidos de ajuda sintéticos, em memória, ainda sem base de dados, com health check, testes HTTP, Dockerfile, Docker Compose e um smoke test no CI. O Sprint B, de 2 de novembro a 6 de dezembro, entrega a fatia vertical: um participante pede ajuda na planta, a sala de controlo vê o pedido com a sugestão da IA, ou sem ela se a IA falhar, e encaminha para uma equipa que o aceita e resolve. São 27 stories. O Sprint C, até 3 de janeiro, completa o MVP: contas, transportes com shuttles e o aviso do modo degradado, avisos, reports e badges, e a avaliação da IA contra a alternativa sem IA. Se o tempo apertar, já temos definido o que cai primeiro.</a:t>
             </a:r>
             <a:endParaRPr lang="en-US" dirty="0"/>
           </a:p>
@@ -1469,7 +1469,7 @@
           <a:p>
             <a:r>
               <a:rPr lang="en-US" dirty="0"/>
-              <a:t>(~45 s) Trabalhamos com GitHub Flow. Todo o trabalho começa numa issue; a regra é uma user story, uma issue, um pull request. O branch é curto, o PR passa pela verificação automática das convenções, pelo pipeline de CI, pela revisão do Copilot e pela aprovação de outro membro, e entra com squash merge. O main está sempre pronto a entregar. Temos duas reuniões por semana: o planeamento na aula e o stand-up ao fim de semana, mais a review com os investidores no fim de cada sprint. O board do GitHub Projects segue o estado de cada item, de Backlog a Done.</a:t>
+              <a:t>(~45 s) Trabalhamos com GitHub Flow. Todo o trabalho começa numa issue; a regra é uma user story, uma issue, um pull request. O branch é curto, o PR passa pela verificação automática das convenções, pelo pipeline de CI e pela aprovação de outro membro, e entra com squash merge. A revisão do Copilot é pedida em todos os PRs, mas até agora falhou sempre por falta de quota. O main está sempre pronto a entregar. Temos duas reuniões por semana: o planeamento na aula e o stand-up ao fim de semana, mais a review com os investidores no fim de cada sprint. O board do GitHub Projects segue o estado de cada item, de Backlog a Done.</a:t>
             </a:r>
             <a:endParaRPr lang="en-US" dirty="0"/>
           </a:p>
@@ -2085,7 +2085,7 @@
           <a:p>
             <a:r>
               <a:rPr lang="en-US" dirty="0"/>
-              <a:t>(~60 s) O percurso central é o pedido de ajuda. A Rita toca em Pedir ajuda; primeiro aparece o 112 e, se não for emergência, escolhe a categoria e partilha a localização do telemóvel; se recusar, marca o sítio na planta. O pedido fica guardado logo e aparece na sala de controlo em menos de 5 segundos. Em paralelo, a IA sugere categoria, prioridade e equipa em menos de 30 segundos; se a IA falhar, o pedido aparece como Não triado, e nada se perde. O Miguel confirma ou altera e encaminha para uma equipa. A Inês aceita no telemóvel, vai ao sítio indicado e fecha o pedido. A Rita acompanha o estado ao vivo. Em baixo estão os outros percursos: encontrar informação, criar e configurar um evento, publicar um aviso, reportar um problema e ganhar um badge, e o check-in.</a:t>
+              <a:t>(~60 s) O percurso central é o pedido de ajuda. A Rita toca em Pedir ajuda, escolhe a categoria e partilha a localização do telemóvel; se recusar, marca o sítio na planta. O pedido fica guardado logo e aparece na sala de controlo em menos de 5 segundos. Em paralelo, a IA sugere categoria, prioridade e equipa em menos de 30 segundos; se a IA falhar, o pedido aparece como Não triado, e nada se perde. O Miguel confirma ou altera e encaminha para uma equipa. A Inês aceita no telemóvel, vai ao sítio indicado e fecha o pedido. A Rita acompanha o estado ao vivo. Em baixo estão os outros percursos: encontrar informação, criar e configurar um evento, publicar um aviso, reportar um problema e ganhar um badge, e o check-in.</a:t>
             </a:r>
             <a:endParaRPr lang="en-US" dirty="0"/>
           </a:p>
@@ -2261,7 +2261,7 @@
           <a:p>
             <a:r>
               <a:rPr lang="en-US" dirty="0"/>
-              <a:t>(~75 s) A arquitetura. Há uma única aplicação web em React, com páginas pensadas para o telemóvel ou para o portátil. Tudo entra pelo API gateway, que valida o token do Keycloak, aplica CORS e limites por conta. Atrás há cinco microserviços em Spring Boot, cada um com a sua base de dados PostgreSQL e o seu Dockerfile, desde o Sprint A. Os serviços não chamam a API uns dos outros: comunicam só por eventos no RabbitMQ, com tabela de outbox, consumidores idempotentes e filas de dead letter, por isso nenhum pedido se perde. A triagem é o fluxo assíncrono: o Reports publica o pedido e o worker chama o modelo local, Ollama com qwen3 de 4 mil milhões de parâmetros, através do WireMock, que também serve para simular falhas. A integração externa é a API de autocarros do Porto Digital, com o WireMock para testes e para a demo. Os dois modos degradados: sem IA, o pedido aparece como Não triado; sem transportes, mostramos os últimos dados válidos com aviso. Tudo corre localmente com Docker Compose, com autorização do professor por causa dos custos.</a:t>
+              <a:t>(~75 s) A arquitetura. Há uma única aplicação web em React, com páginas pensadas para o telemóvel ou para o portátil. Tudo entra pelo API gateway, que valida o token do Keycloak, aplica CORS e limites por conta. Atrás há cinco microserviços em Spring Boot, cada um com a sua base de dados PostgreSQL e o seu Dockerfile. Esta é a arquitetura alvo: hoje corre só o Reports, o walking skeleton, e o resto chega nos Sprints B e C. Os serviços não chamam a API uns dos outros: comunicam só por eventos no RabbitMQ, com tabela de outbox, consumidores idempotentes e filas de dead letter, por isso nenhum pedido se perde. A triagem é o fluxo assíncrono: o Reports publica o pedido e o worker chama o modelo local, Ollama com qwen3 de 4 mil milhões de parâmetros, através do WireMock, que também serve para simular falhas. A integração externa é a API de autocarros do Porto Digital, com o WireMock para testes e para a demo. Os dois modos degradados: sem IA, o pedido aparece como Não triado; sem transportes, mostramos os últimos dados válidos com aviso. Tudo corre localmente com Docker Compose, com autorização do professor por causa dos custos.</a:t>
             </a:r>
             <a:endParaRPr lang="en-US" dirty="0"/>
           </a:p>
@@ -7287,7 +7287,7 @@
                   <a:schemeClr val="tx1"/>
                 </a:solidFill>
               </a:rPr>
-              <a:t>Reports service: creates and reads synthetic help requests, with health check, HTTP tests, Dockerfile, Compose and CI smoke test</a:t>
+              <a:t>Reports service: creates and reads synthetic help requests in memory, with health check, HTTP tests, Dockerfile, Compose and CI smoke test</a:t>
             </a:r>
             <a:endParaRPr lang="en-US" sz="1200" dirty="0"/>
           </a:p>
@@ -9719,7 +9719,7 @@
                   <a:schemeClr val="tx1"/>
                 </a:solidFill>
               </a:rPr>
-              <a:t>Copilot review + one team approval</a:t>
+              <a:t>One team approval (Copilot also requested)</a:t>
             </a:r>
             <a:endParaRPr lang="en-US" sz="1300" dirty="0"/>
           </a:p>
@@ -14614,7 +14614,7 @@
                   <a:schemeClr val="tx1"/>
                 </a:solidFill>
               </a:rPr>
-              <a:t>Asks for help: category and her phone location, or a spot on the map (112 first)</a:t>
+              <a:t>Asks for help: category and her phone location, or a spot on the map</a:t>
             </a:r>
             <a:endParaRPr lang="en-US" sz="1200" dirty="0"/>
           </a:p>

--- a/Docs/Presentation/Farol_Sprint_A_Presentation.pptx
+++ b/Docs/Presentation/Farol_Sprint_A_Presentation.pptx
@@ -1029,7 +1029,7 @@
           <a:p>
             <a:r>
               <a:rPr lang="en-US" dirty="0"/>
-              <a:t>(~50 s) Os custos, com salários e infraestrutura, como o professor pediu. O desenvolvimento do projeto inteiro, com seis papéis a tempo inteiro durante 3,35 meses, custa cerca de 58 500 euros, quase tudo salários. A manutenção, com uma pessoa e produção na cloud, custa cerca de 3 400 euros por mês. Desenvolvimento mais o primeiro ano dá perto de 100 mil euros, a ordem de grandeza para uma organização. A entrega é local por causa do custo: localmente só pagamos o Copilot, enquanto a demo na cloud custaria cerca de 300 euros e a operação contínua 358 euros por mês, contra um crédito único de estudante de 89 euros. O professor autorizou a entrega local.</a:t>
+              <a:t>(~50 s) Os custos, com salários e infraestrutura, como o professor pediu. O desenvolvimento do projeto inteiro, com seis papéis a tempo inteiro durante 3,35 meses, custa cerca de 58 500 euros, quase tudo salários. A manutenção, com uma pessoa e produção na cloud, custa cerca de 3 400 euros por mês. Desenvolvimento mais o primeiro ano dá perto de 100 mil euros, a ordem de grandeza para uma organização. A entrega é local por causa do custo: localmente o custo extra é zero, porque o Copilot é igual nos dois cenários e a equipa usa-o grátis pelo GitHub Education, enquanto a demo na cloud custaria cerca de 300 euros e a operação contínua 358 euros por mês, contra um crédito único de estudante de 89 euros. O professor autorizou a entrega local.</a:t>
             </a:r>
             <a:endParaRPr lang="en-US" dirty="0"/>
           </a:p>
@@ -1469,7 +1469,7 @@
           <a:p>
             <a:r>
               <a:rPr lang="en-US" dirty="0"/>
-              <a:t>(~45 s) Trabalhamos com GitHub Flow. Todo o trabalho começa numa issue; a regra é uma user story, uma issue, um pull request. O branch é curto, o PR passa pela verificação automática das convenções, pelo pipeline de CI e pela aprovação de outro membro, e entra com squash merge. A revisão do Copilot é pedida em todos os PRs, mas até agora falhou sempre por falta de quota. O main está sempre pronto a entregar. Temos duas reuniões por semana: o planeamento na aula e o stand-up ao fim de semana, mais a review com os investidores no fim de cada sprint. O board do GitHub Projects segue o estado de cada item, de Backlog a Done.</a:t>
+              <a:t>(~45 s) Trabalhamos com GitHub Flow. Todo o trabalho começa numa issue; a regra é uma user story, uma issue, um pull request. O branch é curto, o PR passa pela verificação automática das convenções, pelo pipeline de CI e pela aprovação de outro membro, e entra com squash merge. O GitHub só obriga à aprovação; o CI verde e as conversas resolvidas fazem parte da Definition of Done e são verificados na revisão. A revisão do Copilot está ligada no ruleset, mas até agora falhou sempre por falta de quota. O main está sempre pronto a entregar. Temos duas reuniões por semana: o planeamento na aula e o stand-up ao fim de semana, mais a review com os investidores no fim de cada sprint. O board do GitHub Projects segue o estado de cada item, de Backlog a Done.</a:t>
             </a:r>
             <a:endParaRPr lang="en-US" dirty="0"/>
           </a:p>
@@ -1821,7 +1821,7 @@
           <a:p>
             <a:r>
               <a:rPr lang="en-US" dirty="0"/>
-              <a:t>(~75 s) Fizemos um inquérito no Google Forms entre 3 e 6 de outubro e a 30 de outubro, com 32 respostas válidas. Ficam 30 pessoas que já foram a um festival académico, a maioria à Queima do Porto. É pouco, o objetivo eram 100, e é uma amostra de conveniência, por isso os números mostram direção, não valores exatos. Três coisas: primeiro, 80 % esperou mais de meia hora para entrar, é de longe o problema mais comum. Segundo, 87 % diz que usaria a aplicação durante a noite, acima da meta de 60 %. Terceiro, a facilidade de encontrar informação teve média 2,97 em 5, mesmo no limite da meta de 3, e o resultado depende das respostas de 30 de outubro; por isso vamos confirmá-lo com um teste em condições de noite, com ruído e rede lenta. No gráfico, a planta do recinto é a funcionalidade mais escolhida, 52 %, logo seguida do botão de ajuda, 48 %; o assistente de perguntas é a última, 10 %. A barreira mais citada foi a bateria, 48 %.</a:t>
+              <a:t>(~75 s) Fizemos um inquérito no Google Forms entre 3 e 6 de outubro e a 30 de outubro, com 32 respostas válidas. Ficam 30 pessoas que já foram a um festival académico, a maioria à Queima do Porto. É pouco, o objetivo eram 100, e é uma amostra de conveniência, por isso os números mostram direção, não valores exatos. Três coisas: primeiro, 80 % esperou mais de meia hora para entrar, é de longe o problema mais comum. Segundo, 87 % diz que usaria a aplicação durante a noite, acima da meta de 60 %; aqui são 27 de 31, porque esta pergunta conta também quem ainda não foi mas tenciona ir. Terceiro, a facilidade de encontrar informação teve média 2,97 em 5, mesmo no limite da meta de 3, e o resultado depende das respostas de 30 de outubro; por isso vamos confirmá-lo com um teste em condições de noite, com ruído e rede lenta. No gráfico, a planta do recinto é a funcionalidade mais escolhida, 52 %, logo seguida do botão de ajuda, 48 %; o assistente de perguntas é a última, 10 %. A barreira mais citada foi a bateria, 48 %.</a:t>
             </a:r>
             <a:endParaRPr lang="en-US" dirty="0"/>
           </a:p>
@@ -2349,7 +2349,7 @@
           <a:p>
             <a:r>
               <a:rPr lang="en-US" dirty="0"/>
-              <a:t>(~45 s) A stack: Java 21 com Spring Boot 4 no backend, uma aplicação React no frontend, PostgreSQL com Flyway, RabbitMQ para mensagens, Keycloak para identidade e Spring Cloud Gateway à entrada. A entrega usa GitHub Actions, com análise de qualidade no SonarQube Cloud, e Docker Compose, e os testes de carga usam k6. Todas as decisões estão em 13 ADRs, cada um com a escolha, as alternativas e o porquê. Estão todos aceites; nos da IA e da observabilidade falta ainda a evidência a correr, que chega com o Sprint B.</a:t>
+              <a:t>(~45 s) A stack: Java 21 com Spring Boot 4 no backend, uma aplicação React no frontend, PostgreSQL com Flyway, RabbitMQ para mensagens, Keycloak para identidade e Spring Cloud Gateway à entrada. A entrega usa GitHub Actions, com análise de qualidade no SonarQube Cloud, e Docker Compose, e os testes de carga usam k6. Todas as decisões estão em 13 ADRs, cada um com a escolha, as alternativas e o porquê. Onze estão aceites; o do mapa, o ADR-007, ainda está proposto, e o ADR-011 regista a entrega local autorizada pelo professor. Nos da IA e da observabilidade falta ainda a evidência a correr, que chega com o Sprint B.</a:t>
             </a:r>
             <a:endParaRPr lang="en-US" dirty="0"/>
           </a:p>
@@ -4784,7 +4784,7 @@
                   <a:schemeClr val="accent3"/>
                 </a:solidFill>
               </a:rPr>
-              <a:t>1 FTE + 377 € a month of cloud</a:t>
+              <a:t>1 FTE + 377 € a month of infrastructure (358 € cloud)</a:t>
             </a:r>
             <a:endParaRPr lang="en-US" sz="1200" dirty="0"/>
           </a:p>
@@ -5012,7 +5012,7 @@
                   <a:schemeClr val="bg1"/>
                 </a:solidFill>
               </a:rPr>
-              <a:t>Local: 0 € beyond Copilot (notional 102 €/month), same five services and databases on a laptop</a:t>
+              <a:t>Local: 0 € beyond Copilot (notional 102 €/month), from Sprint B the five services and six databases on a laptop</a:t>
             </a:r>
             <a:endParaRPr lang="en-US" sz="1300" dirty="0"/>
           </a:p>
@@ -9701,7 +9701,7 @@
                   <a:schemeClr val="tx1"/>
                 </a:solidFill>
               </a:rPr>
-              <a:t>CI green: build, tests, image, smoke test</a:t>
+              <a:t>Required on main: one team approval</a:t>
             </a:r>
             <a:endParaRPr lang="en-US" sz="1300" dirty="0"/>
           </a:p>
@@ -9719,7 +9719,7 @@
                   <a:schemeClr val="tx1"/>
                 </a:solidFill>
               </a:rPr>
-              <a:t>One team approval (Copilot also requested)</a:t>
+              <a:t>DoD: CI green (build, tests, image, smoke test)</a:t>
             </a:r>
             <a:endParaRPr lang="en-US" sz="1300" dirty="0"/>
           </a:p>
@@ -9737,7 +9737,7 @@
                   <a:schemeClr val="tx1"/>
                 </a:solidFill>
               </a:rPr>
-              <a:t>All conversations resolved</a:t>
+              <a:t>DoD: all conversations resolved</a:t>
             </a:r>
             <a:endParaRPr lang="en-US" sz="1300" dirty="0"/>
           </a:p>
@@ -12014,7 +12014,7 @@
                   <a:schemeClr val="accent3"/>
                 </a:solidFill>
               </a:rPr>
-              <a:t>Google Forms, 3–6 and 30 Oct 2026 · 32 valid answers, n = 30 who have been to a festival · convenience sample</a:t>
+              <a:t>Google Forms, 3–6 and 30 Oct 2026 · 32 valid answers · n = 30 (80 %, 2.97) and n = 31 (87 %) · convenience sample</a:t>
             </a:r>
             <a:endParaRPr lang="en-US" sz="1100" dirty="0"/>
           </a:p>

--- a/Docs/Presentation/Farol_Sprint_A_Presentation.pptx
+++ b/Docs/Presentation/Farol_Sprint_A_Presentation.pptx
@@ -1909,7 +1909,7 @@
           <a:p>
             <a:r>
               <a:rPr lang="en-US" dirty="0"/>
-              <a:t>(~60 s) Do inquérito tirámos cinco decisões. Duas confirmam o que já tínhamos: a planta é o centro da aplicação, e a IA fica na triagem dos pedidos de ajuda e não num chatbot para participantes, que quase ninguém escolheu. Três mudam o backlog: o estado das entradas por porta sobe de Could para Should, porque a espera é o problema mais comum; a bateria e a rede fraca passam a ser restrições de desenho, com páginas leves, e o modo de rede fraca volta a ser discutido; e no pedido de ajuda a aplicação pede a localização do telemóvel, que 71 % aceita partilhar, e quem recusar marca o sítio na planta. O pressuposto de que pedir ajuda pela app é mais rápido ainda não está validado: falta a entrevista ao voluntário de segurança.</a:t>
+              <a:t>(~60 s) Do inquérito tirámos cinco decisões. Duas confirmam o que já tínhamos: a planta é o centro da aplicação, e a IA fica na triagem dos pedidos de ajuda e não num chatbot para participantes, que quase ninguém escolheu. Três mudam o backlog: o estado das entradas por porta sobe de Could para Should, porque a espera é o problema mais comum; a bateria e a rede fraca passam a ser restrições de desenho, com páginas leves, e o modo de rede fraca volta a ser discutido; e no pedido de ajuda a aplicação vai pedir a localização do telemóvel, que 71 % aceita partilhar, com a planta como alternativa. Fazemo-lo por fases: no Sprint B o pedido usa o ponto na planta, e a localização do telemóvel entra no Sprint C, depois de sabermos colocar uma posição GPS na planta. O pressuposto de que pedir ajuda pela app é mais rápido ainda não está validado: falta a entrevista ao voluntário de segurança.</a:t>
             </a:r>
             <a:endParaRPr lang="en-US" dirty="0"/>
           </a:p>
@@ -12812,7 +12812,7 @@
                   <a:schemeClr val="tx2"/>
                 </a:solidFill>
               </a:rPr>
-              <a:t>Help: phone location first, map as fallback</a:t>
+              <a:t>Help: map now, phone location from Sprint C</a:t>
             </a:r>
             <a:endParaRPr lang="en-US" sz="1500" dirty="0"/>
           </a:p>
@@ -12906,7 +12906,7 @@
                   <a:schemeClr val="tx2"/>
                 </a:solidFill>
               </a:rPr>
-              <a:t>Decided</a:t>
+              <a:t>Phased</a:t>
             </a:r>
             <a:endParaRPr lang="en-US" sz="1100" dirty="0"/>
           </a:p>
@@ -20158,7 +20158,7 @@
                   <a:schemeClr val="bg1"/>
                 </a:solidFill>
               </a:rPr>
-              <a:t>001 Microservices from Sprint A</a:t>
+              <a:t>001 Microservices from the start</a:t>
             </a:r>
             <a:endParaRPr lang="en-US" sz="1100" dirty="0"/>
           </a:p>

--- a/Docs/Presentation/Farol_Sprint_A_Presentation.pptx
+++ b/Docs/Presentation/Farol_Sprint_A_Presentation.pptx
@@ -1029,7 +1029,7 @@
           <a:p>
             <a:r>
               <a:rPr lang="en-US" dirty="0"/>
-              <a:t>(~50 s) Os custos, com salários e infraestrutura, como o professor pediu. O desenvolvimento do projeto inteiro, com seis papéis a tempo inteiro durante 3,35 meses, custa cerca de 58 500 euros, quase tudo salários. A manutenção, com uma pessoa e produção na cloud, custa cerca de 3 400 euros por mês. Desenvolvimento mais o primeiro ano dá perto de 100 mil euros, a ordem de grandeza para uma organização. A entrega é local por causa do custo: localmente só pagamos o Copilot, enquanto a demo na cloud custaria cerca de 300 euros e a operação contínua 358 euros por mês, contra um crédito único de estudante de 89 euros. O professor autorizou a entrega local.</a:t>
+              <a:t>(~50 s) Os custos, com salários e infraestrutura, como o professor pediu. O desenvolvimento do projeto inteiro, com seis papéis a tempo inteiro durante 3,35 meses, custa cerca de 58 500 euros, quase tudo salários. A manutenção, com uma pessoa e produção na cloud, custa cerca de 3 400 euros por mês. Desenvolvimento mais o primeiro ano dá perto de 100 mil euros, a ordem de grandeza para uma organização. A entrega é local por causa do custo: localmente o custo extra é zero, porque o Copilot é igual nos dois cenários e a equipa usa-o grátis pelo GitHub Education, enquanto a demo na cloud custaria cerca de 300 euros e a operação contínua 358 euros por mês, contra um crédito único de estudante de 89 euros. O professor autorizou a entrega local.</a:t>
             </a:r>
             <a:endParaRPr lang="en-US" dirty="0"/>
           </a:p>
@@ -1469,7 +1469,7 @@
           <a:p>
             <a:r>
               <a:rPr lang="en-US" dirty="0"/>
-              <a:t>(~45 s) Trabalhamos com GitHub Flow. Todo o trabalho começa numa issue; a regra é uma user story, uma issue, um pull request. O branch é curto, o PR passa pela verificação automática das convenções, pelo pipeline de CI e pela aprovação de outro membro, e entra com squash merge. A revisão do Copilot é pedida em todos os PRs, mas até agora falhou sempre por falta de quota. O main está sempre pronto a entregar. Temos duas reuniões por semana: o planeamento na aula e o stand-up ao fim de semana, mais a review com os investidores no fim de cada sprint. O board do GitHub Projects segue o estado de cada item, de Backlog a Done.</a:t>
+              <a:t>(~45 s) Trabalhamos com GitHub Flow. Todo o trabalho começa numa issue; a regra é uma user story, uma issue, um pull request. O branch é curto, o PR passa pela verificação automática das convenções, pelo pipeline de CI e pela aprovação de outro membro, e entra com squash merge. O GitHub só obriga à aprovação; o CI verde e as conversas resolvidas fazem parte da Definition of Done e são verificados na revisão. A revisão do Copilot está ligada no ruleset, mas até agora falhou sempre por falta de quota. O main está sempre pronto a entregar. Temos duas reuniões por semana: o planeamento na aula e o stand-up ao fim de semana, mais a review com os investidores no fim de cada sprint. O board do GitHub Projects segue o estado de cada item, de Backlog a Done.</a:t>
             </a:r>
             <a:endParaRPr lang="en-US" dirty="0"/>
           </a:p>
@@ -1821,7 +1821,7 @@
           <a:p>
             <a:r>
               <a:rPr lang="en-US" dirty="0"/>
-              <a:t>(~75 s) Fizemos um inquérito no Google Forms entre 3 e 6 de outubro e a 30 de outubro, com 32 respostas válidas. Ficam 30 pessoas que já foram a um festival académico, a maioria à Queima do Porto. É pouco, o objetivo eram 100, e é uma amostra de conveniência, por isso os números mostram direção, não valores exatos. Três coisas: primeiro, 80 % esperou mais de meia hora para entrar, é de longe o problema mais comum. Segundo, 87 % diz que usaria a aplicação durante a noite, acima da meta de 60 %. Terceiro, a facilidade de encontrar informação teve média 2,97 em 5, mesmo no limite da meta de 3, e o resultado depende das respostas de 30 de outubro; por isso vamos confirmá-lo com um teste em condições de noite, com ruído e rede lenta. No gráfico, a planta do recinto é a funcionalidade mais escolhida, 52 %, logo seguida do botão de ajuda, 48 %; o assistente de perguntas é a última, 10 %. A barreira mais citada foi a bateria, 48 %.</a:t>
+              <a:t>(~75 s) Fizemos um inquérito no Google Forms entre 3 e 6 de outubro e a 30 de outubro, com 32 respostas válidas. Ficam 30 pessoas que já foram a um festival académico, a maioria à Queima do Porto. É pouco, o objetivo eram 100, e é uma amostra de conveniência, por isso os números mostram direção, não valores exatos. Três coisas: primeiro, 80 % esperou mais de meia hora para entrar, é de longe o problema mais comum. Segundo, 87 % diz que usaria a aplicação durante a noite, acima da meta de 60 %; aqui são 27 de 31, porque esta pergunta conta também quem ainda não foi mas tenciona ir. Terceiro, a facilidade de encontrar informação teve média 2,97 em 5, mesmo no limite da meta de 3, e o resultado depende das respostas de 30 de outubro; por isso vamos confirmá-lo com um teste em condições de noite, com ruído e rede lenta. No gráfico, a planta do recinto é a funcionalidade mais escolhida, 52 %, logo seguida do botão de ajuda, 48 %; o assistente de perguntas é a última, 10 %. A barreira mais citada foi a bateria, 48 %.</a:t>
             </a:r>
             <a:endParaRPr lang="en-US" dirty="0"/>
           </a:p>
@@ -1909,7 +1909,7 @@
           <a:p>
             <a:r>
               <a:rPr lang="en-US" dirty="0"/>
-              <a:t>(~60 s) Do inquérito tirámos cinco decisões. Duas confirmam o que já tínhamos: a planta é o centro da aplicação, e a IA fica na triagem dos pedidos de ajuda e não num chatbot para participantes, que quase ninguém escolheu. Três mudam o backlog: o estado das entradas por porta sobe de Could para Should, porque a espera é o problema mais comum; a bateria e a rede fraca passam a ser restrições de desenho, com páginas leves, e o modo de rede fraca volta a ser discutido; e no pedido de ajuda a aplicação pede a localização do telemóvel, que 71 % aceita partilhar, e quem recusar marca o sítio na planta. O pressuposto de que pedir ajuda pela app é mais rápido ainda não está validado: falta a entrevista ao voluntário de segurança.</a:t>
+              <a:t>(~60 s) Do inquérito tirámos cinco decisões. Duas confirmam o que já tínhamos: a planta é o centro da aplicação, e a IA fica na triagem dos pedidos de ajuda e não num chatbot para participantes, que quase ninguém escolheu. Três mudam o backlog: o estado das entradas por porta sobe de Could para Should, porque a espera é o problema mais comum; a bateria e a rede fraca passam a ser restrições de desenho, com páginas leves, e o modo de rede fraca volta a ser discutido; e no pedido de ajuda a aplicação vai pedir a localização do telemóvel, que 71 % aceita partilhar, com a planta como alternativa. Fazemo-lo por fases: no Sprint B o pedido usa o ponto na planta, e a localização do telemóvel entra no Sprint C, depois de sabermos colocar uma posição GPS na planta. O pressuposto de que pedir ajuda pela app é mais rápido ainda não está validado: falta a entrevista ao voluntário de segurança.</a:t>
             </a:r>
             <a:endParaRPr lang="en-US" dirty="0"/>
           </a:p>
@@ -2349,7 +2349,7 @@
           <a:p>
             <a:r>
               <a:rPr lang="en-US" dirty="0"/>
-              <a:t>(~45 s) A stack: Java 21 com Spring Boot 4 no backend, uma aplicação React no frontend, PostgreSQL com Flyway, RabbitMQ para mensagens, Keycloak para identidade e Spring Cloud Gateway à entrada. A entrega usa GitHub Actions, com análise de qualidade no SonarQube Cloud, e Docker Compose, e os testes de carga usam k6. Todas as decisões estão em 13 ADRs, cada um com a escolha, as alternativas e o porquê. Estão todos aceites; nos da IA e da observabilidade falta ainda a evidência a correr, que chega com o Sprint B.</a:t>
+              <a:t>(~45 s) A stack: Java 21 com Spring Boot 4 no backend, uma aplicação React no frontend, PostgreSQL com Flyway, RabbitMQ para mensagens, Keycloak para identidade e Spring Cloud Gateway à entrada. A entrega usa GitHub Actions, com análise de qualidade no SonarQube Cloud, e Docker Compose, e os testes de carga usam k6. Todas as decisões estão em 13 ADRs, cada um com a escolha, as alternativas e o porquê. Onze estão aceites; o do mapa, o ADR-007, ainda está proposto, e o ADR-011 regista a entrega local autorizada pelo professor. Nos da IA e da observabilidade falta ainda a evidência a correr, que chega com o Sprint B.</a:t>
             </a:r>
             <a:endParaRPr lang="en-US" dirty="0"/>
           </a:p>
@@ -4784,7 +4784,7 @@
                   <a:schemeClr val="accent3"/>
                 </a:solidFill>
               </a:rPr>
-              <a:t>1 FTE + 377 € a month of cloud</a:t>
+              <a:t>1 FTE + 377 € a month of infrastructure (358 € cloud)</a:t>
             </a:r>
             <a:endParaRPr lang="en-US" sz="1200" dirty="0"/>
           </a:p>
@@ -5012,7 +5012,7 @@
                   <a:schemeClr val="bg1"/>
                 </a:solidFill>
               </a:rPr>
-              <a:t>Local: 0 € beyond Copilot (notional 102 €/month), same five services and databases on a laptop</a:t>
+              <a:t>Local: 0 € beyond Copilot (notional 102 €/month), from Sprint B the five services and six databases on a laptop</a:t>
             </a:r>
             <a:endParaRPr lang="en-US" sz="1300" dirty="0"/>
           </a:p>
@@ -9701,7 +9701,7 @@
                   <a:schemeClr val="tx1"/>
                 </a:solidFill>
               </a:rPr>
-              <a:t>CI green: build, tests, image, smoke test</a:t>
+              <a:t>Required on main: one team approval</a:t>
             </a:r>
             <a:endParaRPr lang="en-US" sz="1300" dirty="0"/>
           </a:p>
@@ -9719,7 +9719,7 @@
                   <a:schemeClr val="tx1"/>
                 </a:solidFill>
               </a:rPr>
-              <a:t>One team approval (Copilot also requested)</a:t>
+              <a:t>DoD: CI green (build, tests, image, smoke test)</a:t>
             </a:r>
             <a:endParaRPr lang="en-US" sz="1300" dirty="0"/>
           </a:p>
@@ -9737,7 +9737,7 @@
                   <a:schemeClr val="tx1"/>
                 </a:solidFill>
               </a:rPr>
-              <a:t>All conversations resolved</a:t>
+              <a:t>DoD: all conversations resolved</a:t>
             </a:r>
             <a:endParaRPr lang="en-US" sz="1300" dirty="0"/>
           </a:p>
@@ -12014,7 +12014,7 @@
                   <a:schemeClr val="accent3"/>
                 </a:solidFill>
               </a:rPr>
-              <a:t>Google Forms, 3–6 and 30 Oct 2026 · 32 valid answers, n = 30 who have been to a festival · convenience sample</a:t>
+              <a:t>Google Forms, 3–6 and 30 Oct 2026 · 32 valid answers · n = 30 (80 %, 2.97) and n = 31 (87 %) · convenience sample</a:t>
             </a:r>
             <a:endParaRPr lang="en-US" sz="1100" dirty="0"/>
           </a:p>
@@ -12812,7 +12812,7 @@
                   <a:schemeClr val="tx2"/>
                 </a:solidFill>
               </a:rPr>
-              <a:t>Help: phone location first, map as fallback</a:t>
+              <a:t>Help: map now, phone location from Sprint C</a:t>
             </a:r>
             <a:endParaRPr lang="en-US" sz="1500" dirty="0"/>
           </a:p>
@@ -12906,7 +12906,7 @@
                   <a:schemeClr val="tx2"/>
                 </a:solidFill>
               </a:rPr>
-              <a:t>Decided</a:t>
+              <a:t>Phased</a:t>
             </a:r>
             <a:endParaRPr lang="en-US" sz="1100" dirty="0"/>
           </a:p>
@@ -20158,7 +20158,7 @@
                   <a:schemeClr val="bg1"/>
                 </a:solidFill>
               </a:rPr>
-              <a:t>001 Microservices from Sprint A</a:t>
+              <a:t>001 Microservices from the start</a:t>
             </a:r>
             <a:endParaRPr lang="en-US" sz="1100" dirty="0"/>
           </a:p>
